--- a/lib/pptx-themes/dark.pptx
+++ b/lib/pptx-themes/dark.pptx
@@ -1,29 +1,141 @@
 
 <file path=ppt/presentation.xml><?xml version="1.0" encoding="utf-8"?>
-<p:presentation xmlns:a="http://schemas.openxmlformats.org/drawingml/2006/main" xmlns:r="http://schemas.openxmlformats.org/officeDocument/2006/relationships" xmlns:p="http://schemas.openxmlformats.org/presentationml/2006/main" saveSubsetFonts="1">
+<p:presentation xmlns:a="http://schemas.openxmlformats.org/drawingml/2006/main" xmlns:r="http://schemas.openxmlformats.org/officeDocument/2006/relationships" xmlns:p="http://schemas.openxmlformats.org/presentationml/2006/main" saveSubsetFonts="1" autoCompressPictures="0">
   <p:sldMasterIdLst>
     <p:sldMasterId id="2147483648" r:id="rId1"/>
   </p:sldMasterIdLst>
-  <p:sldSz cx="12192000" cy="6858000"/>
+  <p:notesMasterIdLst>
+    <p:notesMasterId r:id="rId6"/>
+  </p:notesMasterIdLst>
+  <p:sldIdLst>
+    <p:sldId id="256" r:id="rId2"/>
+    <p:sldId id="257" r:id="rId3"/>
+    <p:sldId id="258" r:id="rId4"/>
+    <p:sldId id="259" r:id="rId5"/>
+  </p:sldIdLst>
+  <p:sldSz cx="9144000" cy="5143500" type="screen16x9"/>
   <p:notesSz cx="6858000" cy="9144000"/>
   <p:defaultTextStyle>
     <a:defPPr>
       <a:defRPr lang="en-US"/>
     </a:defPPr>
+    <a:lvl1pPr marL="0" algn="l" defTabSz="457200" rtl="0" eaLnBrk="1" latinLnBrk="0" hangingPunct="1">
+      <a:defRPr sz="1800" kern="1200">
+        <a:solidFill>
+          <a:schemeClr val="tx1"/>
+        </a:solidFill>
+        <a:latin typeface="+mn-lt"/>
+        <a:ea typeface="+mn-ea"/>
+        <a:cs typeface="+mn-cs"/>
+      </a:defRPr>
+    </a:lvl1pPr>
+    <a:lvl2pPr marL="457200" algn="l" defTabSz="457200" rtl="0" eaLnBrk="1" latinLnBrk="0" hangingPunct="1">
+      <a:defRPr sz="1800" kern="1200">
+        <a:solidFill>
+          <a:schemeClr val="tx1"/>
+        </a:solidFill>
+        <a:latin typeface="+mn-lt"/>
+        <a:ea typeface="+mn-ea"/>
+        <a:cs typeface="+mn-cs"/>
+      </a:defRPr>
+    </a:lvl2pPr>
+    <a:lvl3pPr marL="914400" algn="l" defTabSz="457200" rtl="0" eaLnBrk="1" latinLnBrk="0" hangingPunct="1">
+      <a:defRPr sz="1800" kern="1200">
+        <a:solidFill>
+          <a:schemeClr val="tx1"/>
+        </a:solidFill>
+        <a:latin typeface="+mn-lt"/>
+        <a:ea typeface="+mn-ea"/>
+        <a:cs typeface="+mn-cs"/>
+      </a:defRPr>
+    </a:lvl3pPr>
+    <a:lvl4pPr marL="1371600" algn="l" defTabSz="457200" rtl="0" eaLnBrk="1" latinLnBrk="0" hangingPunct="1">
+      <a:defRPr sz="1800" kern="1200">
+        <a:solidFill>
+          <a:schemeClr val="tx1"/>
+        </a:solidFill>
+        <a:latin typeface="+mn-lt"/>
+        <a:ea typeface="+mn-ea"/>
+        <a:cs typeface="+mn-cs"/>
+      </a:defRPr>
+    </a:lvl4pPr>
+    <a:lvl5pPr marL="1828800" algn="l" defTabSz="457200" rtl="0" eaLnBrk="1" latinLnBrk="0" hangingPunct="1">
+      <a:defRPr sz="1800" kern="1200">
+        <a:solidFill>
+          <a:schemeClr val="tx1"/>
+        </a:solidFill>
+        <a:latin typeface="+mn-lt"/>
+        <a:ea typeface="+mn-ea"/>
+        <a:cs typeface="+mn-cs"/>
+      </a:defRPr>
+    </a:lvl5pPr>
+    <a:lvl6pPr marL="2286000" algn="l" defTabSz="457200" rtl="0" eaLnBrk="1" latinLnBrk="0" hangingPunct="1">
+      <a:defRPr sz="1800" kern="1200">
+        <a:solidFill>
+          <a:schemeClr val="tx1"/>
+        </a:solidFill>
+        <a:latin typeface="+mn-lt"/>
+        <a:ea typeface="+mn-ea"/>
+        <a:cs typeface="+mn-cs"/>
+      </a:defRPr>
+    </a:lvl6pPr>
+    <a:lvl7pPr marL="2743200" algn="l" defTabSz="457200" rtl="0" eaLnBrk="1" latinLnBrk="0" hangingPunct="1">
+      <a:defRPr sz="1800" kern="1200">
+        <a:solidFill>
+          <a:schemeClr val="tx1"/>
+        </a:solidFill>
+        <a:latin typeface="+mn-lt"/>
+        <a:ea typeface="+mn-ea"/>
+        <a:cs typeface="+mn-cs"/>
+      </a:defRPr>
+    </a:lvl7pPr>
+    <a:lvl8pPr marL="3200400" algn="l" defTabSz="457200" rtl="0" eaLnBrk="1" latinLnBrk="0" hangingPunct="1">
+      <a:defRPr sz="1800" kern="1200">
+        <a:solidFill>
+          <a:schemeClr val="tx1"/>
+        </a:solidFill>
+        <a:latin typeface="+mn-lt"/>
+        <a:ea typeface="+mn-ea"/>
+        <a:cs typeface="+mn-cs"/>
+      </a:defRPr>
+    </a:lvl8pPr>
+    <a:lvl9pPr marL="3657600" algn="l" defTabSz="457200" rtl="0" eaLnBrk="1" latinLnBrk="0" hangingPunct="1">
+      <a:defRPr sz="1800" kern="1200">
+        <a:solidFill>
+          <a:schemeClr val="tx1"/>
+        </a:solidFill>
+        <a:latin typeface="+mn-lt"/>
+        <a:ea typeface="+mn-ea"/>
+        <a:cs typeface="+mn-cs"/>
+      </a:defRPr>
+    </a:lvl9pPr>
   </p:defaultTextStyle>
+  <p:extLst>
+    <p:ext uri="{EFAFB233-063F-42B5-8137-9DF3F51BA10A}">
+      <p15:sldGuideLst xmlns:p15="http://schemas.microsoft.com/office/powerpoint/2012/main">
+        <p15:guide id="1" orient="horz" pos="1620" userDrawn="1">
+          <p15:clr>
+            <a:srgbClr val="A4A3A4"/>
+          </p15:clr>
+        </p15:guide>
+        <p15:guide id="2" pos="2880" userDrawn="1">
+          <p15:clr>
+            <a:srgbClr val="A4A3A4"/>
+          </p15:clr>
+        </p15:guide>
+      </p15:sldGuideLst>
+    </p:ext>
+  </p:extLst>
 </p:presentation>
 </file>
 
-<file path=ppt/slideLayouts/slideLayout1.xml><?xml version="1.0" encoding="utf-8"?>
-<p:sldLayout xmlns:a="http://schemas.openxmlformats.org/drawingml/2006/main" xmlns:r="http://schemas.openxmlformats.org/officeDocument/2006/relationships" xmlns:p="http://schemas.openxmlformats.org/presentationml/2006/main" type="title" preserve="1">
-  <p:cSld name="Title Slide">
+<file path=ppt/notesMasters/notesMaster1.xml><?xml version="1.0" encoding="utf-8"?>
+<p:notesMaster xmlns:a="http://schemas.openxmlformats.org/drawingml/2006/main" xmlns:r="http://schemas.openxmlformats.org/officeDocument/2006/relationships" xmlns:p="http://schemas.openxmlformats.org/presentationml/2006/main">
+  <p:cSld>
     <p:bg>
-      <p:bgPr>
-        <a:solidFill>
-          <a:srgbClr val="1E1E1E"/>
-        </a:solidFill>
-        <a:effectLst/>
-      </p:bgPr>
+      <p:bgRef idx="1001">
+        <a:schemeClr val="bg1"/>
+      </p:bgRef>
     </p:bg>
     <p:spTree>
       <p:nvGrpSpPr>
@@ -41,94 +153,334 @@
       </p:grpSpPr>
       <p:sp>
         <p:nvSpPr>
-          <p:cNvPr id="2" name="Title 1"/>
-          <p:cNvSpPr>
-            <a:spLocks noGrp="1"/>
-          </p:cNvSpPr>
-          <p:nvPr>
-            <p:ph type="ctrTitle"/>
+          <p:cNvPr id="2" name="Header Placeholder 1"/>
+          <p:cNvSpPr>
+            <a:spLocks noGrp="1"/>
+          </p:cNvSpPr>
+          <p:nvPr>
+            <p:ph type="hdr" sz="quarter"/>
           </p:nvPr>
         </p:nvSpPr>
         <p:spPr>
           <a:xfrm>
-            <a:off x="1524000" y="1122363"/>
-            <a:ext cx="9144000" cy="2387600"/>
+            <a:off x="0" y="0"/>
+            <a:ext cx="2971800" cy="458788"/>
           </a:xfrm>
+          <a:prstGeom prst="rect">
+            <a:avLst/>
+          </a:prstGeom>
         </p:spPr>
         <p:txBody>
-          <a:bodyPr anchor="b"/>
+          <a:bodyPr vert="horz" lIns="91440" tIns="45720" rIns="91440" bIns="45720" rtlCol="0"/>
           <a:lstStyle>
-            <a:lvl1pPr algn="ctr">
-              <a:defRPr sz="6000">
-                <a:solidFill>
-                  <a:schemeClr val="dk1"/>
-                </a:solidFill>
-              </a:defRPr>
+            <a:lvl1pPr algn="l">
+              <a:defRPr sz="1200"/>
             </a:lvl1pPr>
           </a:lstStyle>
           <a:p>
-            <a:r>
-              <a:rPr lang="en-US"/>
-              <a:t>Click to edit title</a:t>
-            </a:r>
-          </a:p>
-        </p:txBody>
-      </p:sp>
-      <p:sp>
-        <p:nvSpPr>
-          <p:cNvPr id="3" name="Subtitle 2"/>
-          <p:cNvSpPr>
-            <a:spLocks noGrp="1"/>
-          </p:cNvSpPr>
-          <p:nvPr>
-            <p:ph type="subTitle" idx="1"/>
+            <a:endParaRPr lang="en-US"/>
+          </a:p>
+        </p:txBody>
+      </p:sp>
+      <p:sp>
+        <p:nvSpPr>
+          <p:cNvPr id="3" name="Date Placeholder 2"/>
+          <p:cNvSpPr>
+            <a:spLocks noGrp="1"/>
+          </p:cNvSpPr>
+          <p:nvPr>
+            <p:ph type="dt" idx="1"/>
           </p:nvPr>
         </p:nvSpPr>
         <p:spPr>
           <a:xfrm>
-            <a:off x="1524000" y="3602038"/>
-            <a:ext cx="9144000" cy="1655762"/>
+            <a:off x="3884613" y="0"/>
+            <a:ext cx="2971800" cy="458788"/>
           </a:xfrm>
+          <a:prstGeom prst="rect">
+            <a:avLst/>
+          </a:prstGeom>
         </p:spPr>
         <p:txBody>
-          <a:bodyPr/>
+          <a:bodyPr vert="horz" lIns="91440" tIns="45720" rIns="91440" bIns="45720" rtlCol="0"/>
           <a:lstStyle>
-            <a:lvl1pPr marL="0" indent="0" algn="ctr">
-              <a:buNone/>
-              <a:defRPr sz="2400">
-                <a:solidFill>
-                  <a:schemeClr val="dk1"/>
-                </a:solidFill>
-              </a:defRPr>
+            <a:lvl1pPr algn="r">
+              <a:defRPr sz="1200"/>
             </a:lvl1pPr>
           </a:lstStyle>
           <a:p>
-            <a:r>
-              <a:rPr lang="en-US"/>
-              <a:t>Click to edit subtitle</a:t>
-            </a:r>
+            <a:fld id="{0F9C1CCF-B725-44A7-AA57-5E433BD85C9F}" type="datetimeFigureOut">
+              <a:rPr lang="en-US" smtClean="0"/>
+              <a:t>1/2/22</a:t>
+            </a:fld>
+            <a:endParaRPr lang="en-US"/>
+          </a:p>
+        </p:txBody>
+      </p:sp>
+      <p:sp>
+        <p:nvSpPr>
+          <p:cNvPr id="4" name="Slide Image Placeholder 3"/>
+          <p:cNvSpPr>
+            <a:spLocks noGrp="1" noRot="1" noChangeAspect="1"/>
+          </p:cNvSpPr>
+          <p:nvPr>
+            <p:ph type="sldImg" idx="2"/>
+          </p:nvPr>
+        </p:nvSpPr>
+        <p:spPr>
+          <a:xfrm>
+            <a:off x="685800" y="1143000"/>
+            <a:ext cx="5486400" cy="3086100"/>
+          </a:xfrm>
+          <a:prstGeom prst="rect">
+            <a:avLst/>
+          </a:prstGeom>
+          <a:noFill/>
+          <a:ln w="12700">
+            <a:solidFill>
+              <a:prstClr val="black"/>
+            </a:solidFill>
+          </a:ln>
+        </p:spPr>
+        <p:txBody>
+          <a:bodyPr vert="horz" lIns="91440" tIns="45720" rIns="91440" bIns="45720" rtlCol="0" anchor="ctr"/>
+          <a:lstStyle/>
+          <a:p>
+            <a:endParaRPr lang="en-US"/>
+          </a:p>
+        </p:txBody>
+      </p:sp>
+      <p:sp>
+        <p:nvSpPr>
+          <p:cNvPr id="5" name="Notes Placeholder 4"/>
+          <p:cNvSpPr>
+            <a:spLocks noGrp="1"/>
+          </p:cNvSpPr>
+          <p:nvPr>
+            <p:ph type="body" sz="quarter" idx="3"/>
+          </p:nvPr>
+        </p:nvSpPr>
+        <p:spPr>
+          <a:xfrm>
+            <a:off x="685800" y="4400550"/>
+            <a:ext cx="5486400" cy="3600450"/>
+          </a:xfrm>
+          <a:prstGeom prst="rect">
+            <a:avLst/>
+          </a:prstGeom>
+        </p:spPr>
+        <p:txBody>
+          <a:bodyPr vert="horz" lIns="91440" tIns="45720" rIns="91440" bIns="45720" rtlCol="0"/>
+          <a:lstStyle/>
+          <a:p>
+            <a:pPr lvl="0"/>
+            <a:r>
+              <a:rPr lang="en-US"/>
+              <a:t>Click to edit Master text styles</a:t>
+            </a:r>
+          </a:p>
+          <a:p>
+            <a:pPr lvl="1"/>
+            <a:r>
+              <a:rPr lang="en-US"/>
+              <a:t>Second level</a:t>
+            </a:r>
+          </a:p>
+          <a:p>
+            <a:pPr lvl="2"/>
+            <a:r>
+              <a:rPr lang="en-US"/>
+              <a:t>Third level</a:t>
+            </a:r>
+          </a:p>
+          <a:p>
+            <a:pPr lvl="3"/>
+            <a:r>
+              <a:rPr lang="en-US"/>
+              <a:t>Fourth level</a:t>
+            </a:r>
+          </a:p>
+          <a:p>
+            <a:pPr lvl="4"/>
+            <a:r>
+              <a:rPr lang="en-US"/>
+              <a:t>Fifth level</a:t>
+            </a:r>
+          </a:p>
+        </p:txBody>
+      </p:sp>
+      <p:sp>
+        <p:nvSpPr>
+          <p:cNvPr id="6" name="Footer Placeholder 5"/>
+          <p:cNvSpPr>
+            <a:spLocks noGrp="1"/>
+          </p:cNvSpPr>
+          <p:nvPr>
+            <p:ph type="ftr" sz="quarter" idx="4"/>
+          </p:nvPr>
+        </p:nvSpPr>
+        <p:spPr>
+          <a:xfrm>
+            <a:off x="0" y="8685213"/>
+            <a:ext cx="2971800" cy="458787"/>
+          </a:xfrm>
+          <a:prstGeom prst="rect">
+            <a:avLst/>
+          </a:prstGeom>
+        </p:spPr>
+        <p:txBody>
+          <a:bodyPr vert="horz" lIns="91440" tIns="45720" rIns="91440" bIns="45720" rtlCol="0" anchor="b"/>
+          <a:lstStyle>
+            <a:lvl1pPr algn="l">
+              <a:defRPr sz="1200"/>
+            </a:lvl1pPr>
+          </a:lstStyle>
+          <a:p>
+            <a:endParaRPr lang="en-US"/>
+          </a:p>
+        </p:txBody>
+      </p:sp>
+      <p:sp>
+        <p:nvSpPr>
+          <p:cNvPr id="7" name="Slide Number Placeholder 6"/>
+          <p:cNvSpPr>
+            <a:spLocks noGrp="1"/>
+          </p:cNvSpPr>
+          <p:nvPr>
+            <p:ph type="sldNum" sz="quarter" idx="5"/>
+          </p:nvPr>
+        </p:nvSpPr>
+        <p:spPr>
+          <a:xfrm>
+            <a:off x="3884613" y="8685213"/>
+            <a:ext cx="2971800" cy="458787"/>
+          </a:xfrm>
+          <a:prstGeom prst="rect">
+            <a:avLst/>
+          </a:prstGeom>
+        </p:spPr>
+        <p:txBody>
+          <a:bodyPr vert="horz" lIns="91440" tIns="45720" rIns="91440" bIns="45720" rtlCol="0" anchor="b"/>
+          <a:lstStyle>
+            <a:lvl1pPr algn="r">
+              <a:defRPr sz="1200"/>
+            </a:lvl1pPr>
+          </a:lstStyle>
+          <a:p>
+            <a:fld id="{18BDFEC3-8487-43E8-A154-7C12CBC1FFF2}" type="slidenum">
+              <a:rPr lang="en-US" smtClean="0"/>
+              <a:t>‹#›</a:t>
+            </a:fld>
+            <a:endParaRPr lang="en-US"/>
           </a:p>
         </p:txBody>
       </p:sp>
     </p:spTree>
+    <p:extLst>
+      <p:ext uri="{BB962C8B-B14F-4D97-AF65-F5344CB8AC3E}">
+        <p14:creationId xmlns:p14="http://schemas.microsoft.com/office/powerpoint/2010/main" val="3782709779"/>
+      </p:ext>
+    </p:extLst>
   </p:cSld>
-  <p:clrMapOvr>
-    <a:masterClrMapping/>
-  </p:clrMapOvr>
-</p:sldLayout>
+  <p:clrMap bg1="lt1" tx1="dk1" bg2="lt2" tx2="dk2" accent1="accent1" accent2="accent2" accent3="accent3" accent4="accent4" accent5="accent5" accent6="accent6" hlink="hlink" folHlink="folHlink"/>
+  <p:notesStyle>
+    <a:lvl1pPr marL="0" algn="l" defTabSz="914400" rtl="0" eaLnBrk="1" latinLnBrk="0" hangingPunct="1">
+      <a:defRPr sz="1200" kern="1200">
+        <a:solidFill>
+          <a:schemeClr val="tx1"/>
+        </a:solidFill>
+        <a:latin typeface="+mn-lt"/>
+        <a:ea typeface="+mn-ea"/>
+        <a:cs typeface="+mn-cs"/>
+      </a:defRPr>
+    </a:lvl1pPr>
+    <a:lvl2pPr marL="457200" algn="l" defTabSz="914400" rtl="0" eaLnBrk="1" latinLnBrk="0" hangingPunct="1">
+      <a:defRPr sz="1200" kern="1200">
+        <a:solidFill>
+          <a:schemeClr val="tx1"/>
+        </a:solidFill>
+        <a:latin typeface="+mn-lt"/>
+        <a:ea typeface="+mn-ea"/>
+        <a:cs typeface="+mn-cs"/>
+      </a:defRPr>
+    </a:lvl2pPr>
+    <a:lvl3pPr marL="914400" algn="l" defTabSz="914400" rtl="0" eaLnBrk="1" latinLnBrk="0" hangingPunct="1">
+      <a:defRPr sz="1200" kern="1200">
+        <a:solidFill>
+          <a:schemeClr val="tx1"/>
+        </a:solidFill>
+        <a:latin typeface="+mn-lt"/>
+        <a:ea typeface="+mn-ea"/>
+        <a:cs typeface="+mn-cs"/>
+      </a:defRPr>
+    </a:lvl3pPr>
+    <a:lvl4pPr marL="1371600" algn="l" defTabSz="914400" rtl="0" eaLnBrk="1" latinLnBrk="0" hangingPunct="1">
+      <a:defRPr sz="1200" kern="1200">
+        <a:solidFill>
+          <a:schemeClr val="tx1"/>
+        </a:solidFill>
+        <a:latin typeface="+mn-lt"/>
+        <a:ea typeface="+mn-ea"/>
+        <a:cs typeface="+mn-cs"/>
+      </a:defRPr>
+    </a:lvl4pPr>
+    <a:lvl5pPr marL="1828800" algn="l" defTabSz="914400" rtl="0" eaLnBrk="1" latinLnBrk="0" hangingPunct="1">
+      <a:defRPr sz="1200" kern="1200">
+        <a:solidFill>
+          <a:schemeClr val="tx1"/>
+        </a:solidFill>
+        <a:latin typeface="+mn-lt"/>
+        <a:ea typeface="+mn-ea"/>
+        <a:cs typeface="+mn-cs"/>
+      </a:defRPr>
+    </a:lvl5pPr>
+    <a:lvl6pPr marL="2286000" algn="l" defTabSz="914400" rtl="0" eaLnBrk="1" latinLnBrk="0" hangingPunct="1">
+      <a:defRPr sz="1200" kern="1200">
+        <a:solidFill>
+          <a:schemeClr val="tx1"/>
+        </a:solidFill>
+        <a:latin typeface="+mn-lt"/>
+        <a:ea typeface="+mn-ea"/>
+        <a:cs typeface="+mn-cs"/>
+      </a:defRPr>
+    </a:lvl6pPr>
+    <a:lvl7pPr marL="2743200" algn="l" defTabSz="914400" rtl="0" eaLnBrk="1" latinLnBrk="0" hangingPunct="1">
+      <a:defRPr sz="1200" kern="1200">
+        <a:solidFill>
+          <a:schemeClr val="tx1"/>
+        </a:solidFill>
+        <a:latin typeface="+mn-lt"/>
+        <a:ea typeface="+mn-ea"/>
+        <a:cs typeface="+mn-cs"/>
+      </a:defRPr>
+    </a:lvl7pPr>
+    <a:lvl8pPr marL="3200400" algn="l" defTabSz="914400" rtl="0" eaLnBrk="1" latinLnBrk="0" hangingPunct="1">
+      <a:defRPr sz="1200" kern="1200">
+        <a:solidFill>
+          <a:schemeClr val="tx1"/>
+        </a:solidFill>
+        <a:latin typeface="+mn-lt"/>
+        <a:ea typeface="+mn-ea"/>
+        <a:cs typeface="+mn-cs"/>
+      </a:defRPr>
+    </a:lvl8pPr>
+    <a:lvl9pPr marL="3657600" algn="l" defTabSz="914400" rtl="0" eaLnBrk="1" latinLnBrk="0" hangingPunct="1">
+      <a:defRPr sz="1200" kern="1200">
+        <a:solidFill>
+          <a:schemeClr val="tx1"/>
+        </a:solidFill>
+        <a:latin typeface="+mn-lt"/>
+        <a:ea typeface="+mn-ea"/>
+        <a:cs typeface="+mn-cs"/>
+      </a:defRPr>
+    </a:lvl9pPr>
+  </p:notesStyle>
+</p:notesMaster>
 </file>
 
-<file path=ppt/slideLayouts/slideLayout2.xml><?xml version="1.0" encoding="utf-8"?>
-<p:sldLayout xmlns:a="http://schemas.openxmlformats.org/drawingml/2006/main" xmlns:r="http://schemas.openxmlformats.org/officeDocument/2006/relationships" xmlns:p="http://schemas.openxmlformats.org/presentationml/2006/main" type="obj" preserve="1">
-  <p:cSld name="Title and Content">
-    <p:bg>
-      <p:bgPr>
-        <a:solidFill>
-          <a:srgbClr val="1E1E1E"/>
-        </a:solidFill>
-        <a:effectLst/>
-      </p:bgPr>
-    </p:bg>
+<file path=ppt/notesSlides/notesSlide1.xml><?xml version="1.0" encoding="utf-8"?>
+<p:notes xmlns:a="http://schemas.openxmlformats.org/drawingml/2006/main" xmlns:r="http://schemas.openxmlformats.org/officeDocument/2006/relationships" xmlns:p="http://schemas.openxmlformats.org/presentationml/2006/main">
+  <p:cSld>
     <p:spTree>
       <p:nvGrpSpPr>
         <p:cNvPr id="1" name=""/>
@@ -145,11 +497,458 @@
       </p:grpSpPr>
       <p:sp>
         <p:nvSpPr>
+          <p:cNvPr id="2" name="Slide Image Placeholder 1"/>
+          <p:cNvSpPr>
+            <a:spLocks noGrp="1" noRot="1" noChangeAspect="1"/>
+          </p:cNvSpPr>
+          <p:nvPr>
+            <p:ph type="sldImg"/>
+          </p:nvPr>
+        </p:nvSpPr>
+        <p:spPr>
+          <a:xfrm>
+            <a:off x="685800" y="1143000"/>
+            <a:ext cx="5486400" cy="3086100"/>
+          </a:xfrm>
+        </p:spPr>
+      </p:sp>
+      <p:sp>
+        <p:nvSpPr>
+          <p:cNvPr id="3" name="Notes Placeholder 2"/>
+          <p:cNvSpPr>
+            <a:spLocks noGrp="1"/>
+          </p:cNvSpPr>
+          <p:nvPr>
+            <p:ph type="body" idx="1"/>
+          </p:nvPr>
+        </p:nvSpPr>
+        <p:spPr/>
+        <p:txBody>
+          <a:bodyPr/>
+          <a:lstStyle/>
+          <a:p>
+            <a:r>
+              <a:rPr lang="en-US" dirty="0"/>
+              <a:t>Here</a:t>
+            </a:r>
+            <a:r>
+              <a:rPr lang="en-US" baseline="0" dirty="0"/>
+              <a:t> is a note</a:t>
+            </a:r>
+          </a:p>
+          <a:p>
+            <a:endParaRPr lang="en-US" baseline="0" dirty="0"/>
+          </a:p>
+          <a:p>
+            <a:r>
+              <a:rPr lang="en-US" baseline="0" dirty="0"/>
+              <a:t>With another paragraph.</a:t>
+            </a:r>
+            <a:endParaRPr lang="en-US" dirty="0"/>
+          </a:p>
+        </p:txBody>
+      </p:sp>
+      <p:sp>
+        <p:nvSpPr>
+          <p:cNvPr id="4" name="Slide Number Placeholder 3"/>
+          <p:cNvSpPr>
+            <a:spLocks noGrp="1"/>
+          </p:cNvSpPr>
+          <p:nvPr>
+            <p:ph type="sldNum" sz="quarter" idx="10"/>
+          </p:nvPr>
+        </p:nvSpPr>
+        <p:spPr/>
+        <p:txBody>
+          <a:bodyPr/>
+          <a:lstStyle/>
+          <a:p>
+            <a:fld id="{18BDFEC3-8487-43E8-A154-7C12CBC1FFF2}" type="slidenum">
+              <a:rPr lang="en-US" smtClean="0"/>
+              <a:t>1</a:t>
+            </a:fld>
+            <a:endParaRPr lang="en-US"/>
+          </a:p>
+        </p:txBody>
+      </p:sp>
+    </p:spTree>
+    <p:extLst>
+      <p:ext uri="{BB962C8B-B14F-4D97-AF65-F5344CB8AC3E}">
+        <p14:creationId xmlns:p14="http://schemas.microsoft.com/office/powerpoint/2010/main" val="3171319170"/>
+      </p:ext>
+    </p:extLst>
+  </p:cSld>
+  <p:clrMapOvr>
+    <a:masterClrMapping/>
+  </p:clrMapOvr>
+</p:notes>
+</file>
+
+<file path=ppt/notesSlides/notesSlide2.xml><?xml version="1.0" encoding="utf-8"?>
+<p:notes xmlns:a="http://schemas.openxmlformats.org/drawingml/2006/main" xmlns:r="http://schemas.openxmlformats.org/officeDocument/2006/relationships" xmlns:p="http://schemas.openxmlformats.org/presentationml/2006/main">
+  <p:cSld>
+    <p:spTree>
+      <p:nvGrpSpPr>
+        <p:cNvPr id="1" name=""/>
+        <p:cNvGrpSpPr/>
+        <p:nvPr/>
+      </p:nvGrpSpPr>
+      <p:grpSpPr>
+        <a:xfrm>
+          <a:off x="0" y="0"/>
+          <a:ext cx="0" cy="0"/>
+          <a:chOff x="0" y="0"/>
+          <a:chExt cx="0" cy="0"/>
+        </a:xfrm>
+      </p:grpSpPr>
+      <p:sp>
+        <p:nvSpPr>
+          <p:cNvPr id="2" name="Slide Image Placeholder 1"/>
+          <p:cNvSpPr>
+            <a:spLocks noGrp="1" noRot="1" noChangeAspect="1"/>
+          </p:cNvSpPr>
+          <p:nvPr>
+            <p:ph type="sldImg"/>
+          </p:nvPr>
+        </p:nvSpPr>
+        <p:spPr>
+          <a:xfrm>
+            <a:off x="685800" y="1143000"/>
+            <a:ext cx="5486400" cy="3086100"/>
+          </a:xfrm>
+        </p:spPr>
+      </p:sp>
+      <p:sp>
+        <p:nvSpPr>
+          <p:cNvPr id="3" name="Notes Placeholder 2"/>
+          <p:cNvSpPr>
+            <a:spLocks noGrp="1"/>
+          </p:cNvSpPr>
+          <p:nvPr>
+            <p:ph type="body" idx="1"/>
+          </p:nvPr>
+        </p:nvSpPr>
+        <p:spPr/>
+        <p:txBody>
+          <a:bodyPr/>
+          <a:lstStyle/>
+          <a:p>
+            <a:r>
+              <a:rPr lang="en-US" dirty="0"/>
+              <a:t>A</a:t>
+            </a:r>
+            <a:r>
+              <a:rPr lang="en-US" baseline="0" dirty="0"/>
+              <a:t> speaker note on </a:t>
+            </a:r>
+            <a:r>
+              <a:rPr lang="en-US" baseline="0"/>
+              <a:t>this slide too.</a:t>
+            </a:r>
+            <a:endParaRPr lang="en-US"/>
+          </a:p>
+        </p:txBody>
+      </p:sp>
+      <p:sp>
+        <p:nvSpPr>
+          <p:cNvPr id="4" name="Slide Number Placeholder 3"/>
+          <p:cNvSpPr>
+            <a:spLocks noGrp="1"/>
+          </p:cNvSpPr>
+          <p:nvPr>
+            <p:ph type="sldNum" sz="quarter" idx="10"/>
+          </p:nvPr>
+        </p:nvSpPr>
+        <p:spPr/>
+        <p:txBody>
+          <a:bodyPr/>
+          <a:lstStyle/>
+          <a:p>
+            <a:fld id="{18BDFEC3-8487-43E8-A154-7C12CBC1FFF2}" type="slidenum">
+              <a:rPr lang="en-US" smtClean="0"/>
+              <a:t>2</a:t>
+            </a:fld>
+            <a:endParaRPr lang="en-US"/>
+          </a:p>
+        </p:txBody>
+      </p:sp>
+    </p:spTree>
+    <p:extLst>
+      <p:ext uri="{BB962C8B-B14F-4D97-AF65-F5344CB8AC3E}">
+        <p14:creationId xmlns:p14="http://schemas.microsoft.com/office/powerpoint/2010/main" val="3016900036"/>
+      </p:ext>
+    </p:extLst>
+  </p:cSld>
+  <p:clrMapOvr>
+    <a:masterClrMapping/>
+  </p:clrMapOvr>
+</p:notes>
+</file>
+
+<file path=ppt/slideLayouts/slideLayout1.xml><?xml version="1.0" encoding="utf-8"?>
+<p:sldLayout xmlns:a="http://schemas.openxmlformats.org/drawingml/2006/main" xmlns:r="http://schemas.openxmlformats.org/officeDocument/2006/relationships" xmlns:p="http://schemas.openxmlformats.org/presentationml/2006/main" type="title" preserve="1">
+  <p:cSld name="Title Slide">
+    <p:spTree>
+      <p:nvGrpSpPr>
+        <p:cNvPr id="1" name=""/>
+        <p:cNvGrpSpPr/>
+        <p:nvPr/>
+      </p:nvGrpSpPr>
+      <p:grpSpPr>
+        <a:xfrm>
+          <a:off x="0" y="0"/>
+          <a:ext cx="0" cy="0"/>
+          <a:chOff x="0" y="0"/>
+          <a:chExt cx="0" cy="0"/>
+        </a:xfrm>
+      </p:grpSpPr>
+      <p:sp>
+        <p:nvSpPr>
           <p:cNvPr id="2" name="Title 1"/>
           <p:cNvSpPr>
             <a:spLocks noGrp="1"/>
           </p:cNvSpPr>
           <p:nvPr>
+            <p:ph type="ctrTitle"/>
+          </p:nvPr>
+        </p:nvSpPr>
+        <p:spPr>
+          <a:xfrm>
+            <a:off x="685800" y="1597819"/>
+            <a:ext cx="7772400" cy="1102519"/>
+          </a:xfrm>
+        </p:spPr>
+        <p:txBody>
+          <a:bodyPr/>
+          <a:lstStyle/>
+          <a:p>
+            <a:r>
+              <a:rPr lang="en-US"/>
+              <a:t>Click to edit Master title style</a:t>
+            </a:r>
+          </a:p>
+        </p:txBody>
+      </p:sp>
+      <p:sp>
+        <p:nvSpPr>
+          <p:cNvPr id="3" name="Subtitle 2"/>
+          <p:cNvSpPr>
+            <a:spLocks noGrp="1"/>
+          </p:cNvSpPr>
+          <p:nvPr>
+            <p:ph type="subTitle" idx="1"/>
+          </p:nvPr>
+        </p:nvSpPr>
+        <p:spPr>
+          <a:xfrm>
+            <a:off x="1371600" y="2914650"/>
+            <a:ext cx="6400800" cy="1314450"/>
+          </a:xfrm>
+        </p:spPr>
+        <p:txBody>
+          <a:bodyPr/>
+          <a:lstStyle>
+            <a:lvl1pPr marL="0" indent="0" algn="ctr">
+              <a:buNone/>
+              <a:defRPr>
+                <a:solidFill>
+                  <a:schemeClr val="tx1">
+                    <a:tint val="75000"/>
+                  </a:schemeClr>
+                </a:solidFill>
+              </a:defRPr>
+            </a:lvl1pPr>
+            <a:lvl2pPr marL="342900" indent="0" algn="ctr">
+              <a:buNone/>
+              <a:defRPr>
+                <a:solidFill>
+                  <a:schemeClr val="tx1">
+                    <a:tint val="75000"/>
+                  </a:schemeClr>
+                </a:solidFill>
+              </a:defRPr>
+            </a:lvl2pPr>
+            <a:lvl3pPr marL="685800" indent="0" algn="ctr">
+              <a:buNone/>
+              <a:defRPr>
+                <a:solidFill>
+                  <a:schemeClr val="tx1">
+                    <a:tint val="75000"/>
+                  </a:schemeClr>
+                </a:solidFill>
+              </a:defRPr>
+            </a:lvl3pPr>
+            <a:lvl4pPr marL="1028700" indent="0" algn="ctr">
+              <a:buNone/>
+              <a:defRPr>
+                <a:solidFill>
+                  <a:schemeClr val="tx1">
+                    <a:tint val="75000"/>
+                  </a:schemeClr>
+                </a:solidFill>
+              </a:defRPr>
+            </a:lvl4pPr>
+            <a:lvl5pPr marL="1371600" indent="0" algn="ctr">
+              <a:buNone/>
+              <a:defRPr>
+                <a:solidFill>
+                  <a:schemeClr val="tx1">
+                    <a:tint val="75000"/>
+                  </a:schemeClr>
+                </a:solidFill>
+              </a:defRPr>
+            </a:lvl5pPr>
+            <a:lvl6pPr marL="1714500" indent="0" algn="ctr">
+              <a:buNone/>
+              <a:defRPr>
+                <a:solidFill>
+                  <a:schemeClr val="tx1">
+                    <a:tint val="75000"/>
+                  </a:schemeClr>
+                </a:solidFill>
+              </a:defRPr>
+            </a:lvl6pPr>
+            <a:lvl7pPr marL="2057400" indent="0" algn="ctr">
+              <a:buNone/>
+              <a:defRPr>
+                <a:solidFill>
+                  <a:schemeClr val="tx1">
+                    <a:tint val="75000"/>
+                  </a:schemeClr>
+                </a:solidFill>
+              </a:defRPr>
+            </a:lvl7pPr>
+            <a:lvl8pPr marL="2400300" indent="0" algn="ctr">
+              <a:buNone/>
+              <a:defRPr>
+                <a:solidFill>
+                  <a:schemeClr val="tx1">
+                    <a:tint val="75000"/>
+                  </a:schemeClr>
+                </a:solidFill>
+              </a:defRPr>
+            </a:lvl8pPr>
+            <a:lvl9pPr marL="2743200" indent="0" algn="ctr">
+              <a:buNone/>
+              <a:defRPr>
+                <a:solidFill>
+                  <a:schemeClr val="tx1">
+                    <a:tint val="75000"/>
+                  </a:schemeClr>
+                </a:solidFill>
+              </a:defRPr>
+            </a:lvl9pPr>
+          </a:lstStyle>
+          <a:p>
+            <a:r>
+              <a:rPr lang="en-US"/>
+              <a:t>Click to edit Master subtitle style</a:t>
+            </a:r>
+          </a:p>
+        </p:txBody>
+      </p:sp>
+      <p:sp>
+        <p:nvSpPr>
+          <p:cNvPr id="4" name="Date Placeholder 3"/>
+          <p:cNvSpPr>
+            <a:spLocks noGrp="1"/>
+          </p:cNvSpPr>
+          <p:nvPr>
+            <p:ph type="dt" sz="half" idx="10"/>
+          </p:nvPr>
+        </p:nvSpPr>
+        <p:spPr/>
+        <p:txBody>
+          <a:bodyPr/>
+          <a:lstStyle/>
+          <a:p>
+            <a:fld id="{241EB5C9-1307-BA42-ABA2-0BC069CD8E7F}" type="datetimeFigureOut">
+              <a:rPr lang="en-US" smtClean="0"/>
+              <a:t>1/2/22</a:t>
+            </a:fld>
+            <a:endParaRPr lang="en-US"/>
+          </a:p>
+        </p:txBody>
+      </p:sp>
+      <p:sp>
+        <p:nvSpPr>
+          <p:cNvPr id="5" name="Footer Placeholder 4"/>
+          <p:cNvSpPr>
+            <a:spLocks noGrp="1"/>
+          </p:cNvSpPr>
+          <p:nvPr>
+            <p:ph type="ftr" sz="quarter" idx="11"/>
+          </p:nvPr>
+        </p:nvSpPr>
+        <p:spPr/>
+        <p:txBody>
+          <a:bodyPr/>
+          <a:lstStyle/>
+          <a:p>
+            <a:endParaRPr lang="en-US"/>
+          </a:p>
+        </p:txBody>
+      </p:sp>
+      <p:sp>
+        <p:nvSpPr>
+          <p:cNvPr id="6" name="Slide Number Placeholder 5"/>
+          <p:cNvSpPr>
+            <a:spLocks noGrp="1"/>
+          </p:cNvSpPr>
+          <p:nvPr>
+            <p:ph type="sldNum" sz="quarter" idx="12"/>
+          </p:nvPr>
+        </p:nvSpPr>
+        <p:spPr/>
+        <p:txBody>
+          <a:bodyPr/>
+          <a:lstStyle/>
+          <a:p>
+            <a:fld id="{C5EF2332-01BF-834F-8236-50238282D533}" type="slidenum">
+              <a:rPr lang="en-US" smtClean="0"/>
+              <a:t>‹#›</a:t>
+            </a:fld>
+            <a:endParaRPr lang="en-US"/>
+          </a:p>
+        </p:txBody>
+      </p:sp>
+    </p:spTree>
+    <p:extLst>
+      <p:ext uri="{BB962C8B-B14F-4D97-AF65-F5344CB8AC3E}">
+        <p14:creationId xmlns:p14="http://schemas.microsoft.com/office/powerpoint/2010/main" val="1444357513"/>
+      </p:ext>
+    </p:extLst>
+  </p:cSld>
+  <p:clrMapOvr>
+    <a:masterClrMapping/>
+  </p:clrMapOvr>
+</p:sldLayout>
+</file>
+
+<file path=ppt/slideLayouts/slideLayout10.xml><?xml version="1.0" encoding="utf-8"?>
+<p:sldLayout xmlns:a="http://schemas.openxmlformats.org/drawingml/2006/main" xmlns:r="http://schemas.openxmlformats.org/officeDocument/2006/relationships" xmlns:p="http://schemas.openxmlformats.org/presentationml/2006/main" type="vertTx" preserve="1">
+  <p:cSld name="Title and Vertical Text">
+    <p:spTree>
+      <p:nvGrpSpPr>
+        <p:cNvPr id="1" name=""/>
+        <p:cNvGrpSpPr/>
+        <p:nvPr/>
+      </p:nvGrpSpPr>
+      <p:grpSpPr>
+        <a:xfrm>
+          <a:off x="0" y="0"/>
+          <a:ext cx="0" cy="0"/>
+          <a:chOff x="0" y="0"/>
+          <a:chExt cx="0" cy="0"/>
+        </a:xfrm>
+      </p:grpSpPr>
+      <p:sp>
+        <p:nvSpPr>
+          <p:cNvPr id="2" name="Title 1"/>
+          <p:cNvSpPr>
+            <a:spLocks noGrp="1"/>
+          </p:cNvSpPr>
+          <p:nvPr>
             <p:ph type="title"/>
           </p:nvPr>
         </p:nvSpPr>
@@ -160,7 +959,353 @@
           <a:p>
             <a:r>
               <a:rPr lang="en-US"/>
-              <a:t>Click to edit title</a:t>
+              <a:t>Click to edit Master title style</a:t>
+            </a:r>
+          </a:p>
+        </p:txBody>
+      </p:sp>
+      <p:sp>
+        <p:nvSpPr>
+          <p:cNvPr id="3" name="Vertical Text Placeholder 2"/>
+          <p:cNvSpPr>
+            <a:spLocks noGrp="1"/>
+          </p:cNvSpPr>
+          <p:nvPr>
+            <p:ph type="body" orient="vert" idx="1"/>
+          </p:nvPr>
+        </p:nvSpPr>
+        <p:spPr/>
+        <p:txBody>
+          <a:bodyPr vert="eaVert"/>
+          <a:lstStyle/>
+          <a:p>
+            <a:pPr lvl="0"/>
+            <a:r>
+              <a:rPr lang="en-US"/>
+              <a:t>Click to edit Master text styles</a:t>
+            </a:r>
+          </a:p>
+          <a:p>
+            <a:pPr lvl="1"/>
+            <a:r>
+              <a:rPr lang="en-US"/>
+              <a:t>Second level</a:t>
+            </a:r>
+          </a:p>
+          <a:p>
+            <a:pPr lvl="2"/>
+            <a:r>
+              <a:rPr lang="en-US"/>
+              <a:t>Third level</a:t>
+            </a:r>
+          </a:p>
+          <a:p>
+            <a:pPr lvl="3"/>
+            <a:r>
+              <a:rPr lang="en-US"/>
+              <a:t>Fourth level</a:t>
+            </a:r>
+          </a:p>
+          <a:p>
+            <a:pPr lvl="4"/>
+            <a:r>
+              <a:rPr lang="en-US"/>
+              <a:t>Fifth level</a:t>
+            </a:r>
+          </a:p>
+        </p:txBody>
+      </p:sp>
+      <p:sp>
+        <p:nvSpPr>
+          <p:cNvPr id="4" name="Date Placeholder 3"/>
+          <p:cNvSpPr>
+            <a:spLocks noGrp="1"/>
+          </p:cNvSpPr>
+          <p:nvPr>
+            <p:ph type="dt" sz="half" idx="10"/>
+          </p:nvPr>
+        </p:nvSpPr>
+        <p:spPr/>
+        <p:txBody>
+          <a:bodyPr/>
+          <a:lstStyle/>
+          <a:p>
+            <a:fld id="{241EB5C9-1307-BA42-ABA2-0BC069CD8E7F}" type="datetimeFigureOut">
+              <a:rPr lang="en-US" smtClean="0"/>
+              <a:t>1/2/22</a:t>
+            </a:fld>
+            <a:endParaRPr lang="en-US"/>
+          </a:p>
+        </p:txBody>
+      </p:sp>
+      <p:sp>
+        <p:nvSpPr>
+          <p:cNvPr id="5" name="Footer Placeholder 4"/>
+          <p:cNvSpPr>
+            <a:spLocks noGrp="1"/>
+          </p:cNvSpPr>
+          <p:nvPr>
+            <p:ph type="ftr" sz="quarter" idx="11"/>
+          </p:nvPr>
+        </p:nvSpPr>
+        <p:spPr/>
+        <p:txBody>
+          <a:bodyPr/>
+          <a:lstStyle/>
+          <a:p>
+            <a:endParaRPr lang="en-US"/>
+          </a:p>
+        </p:txBody>
+      </p:sp>
+      <p:sp>
+        <p:nvSpPr>
+          <p:cNvPr id="6" name="Slide Number Placeholder 5"/>
+          <p:cNvSpPr>
+            <a:spLocks noGrp="1"/>
+          </p:cNvSpPr>
+          <p:nvPr>
+            <p:ph type="sldNum" sz="quarter" idx="12"/>
+          </p:nvPr>
+        </p:nvSpPr>
+        <p:spPr/>
+        <p:txBody>
+          <a:bodyPr/>
+          <a:lstStyle/>
+          <a:p>
+            <a:fld id="{C5EF2332-01BF-834F-8236-50238282D533}" type="slidenum">
+              <a:rPr lang="en-US" smtClean="0"/>
+              <a:t>‹#›</a:t>
+            </a:fld>
+            <a:endParaRPr lang="en-US"/>
+          </a:p>
+        </p:txBody>
+      </p:sp>
+    </p:spTree>
+    <p:extLst>
+      <p:ext uri="{BB962C8B-B14F-4D97-AF65-F5344CB8AC3E}">
+        <p14:creationId xmlns:p14="http://schemas.microsoft.com/office/powerpoint/2010/main" val="313914798"/>
+      </p:ext>
+    </p:extLst>
+  </p:cSld>
+  <p:clrMapOvr>
+    <a:masterClrMapping/>
+  </p:clrMapOvr>
+</p:sldLayout>
+</file>
+
+<file path=ppt/slideLayouts/slideLayout11.xml><?xml version="1.0" encoding="utf-8"?>
+<p:sldLayout xmlns:a="http://schemas.openxmlformats.org/drawingml/2006/main" xmlns:r="http://schemas.openxmlformats.org/officeDocument/2006/relationships" xmlns:p="http://schemas.openxmlformats.org/presentationml/2006/main" type="vertTitleAndTx" preserve="1">
+  <p:cSld name="Vertical Title and Text">
+    <p:spTree>
+      <p:nvGrpSpPr>
+        <p:cNvPr id="1" name=""/>
+        <p:cNvGrpSpPr/>
+        <p:nvPr/>
+      </p:nvGrpSpPr>
+      <p:grpSpPr>
+        <a:xfrm>
+          <a:off x="0" y="0"/>
+          <a:ext cx="0" cy="0"/>
+          <a:chOff x="0" y="0"/>
+          <a:chExt cx="0" cy="0"/>
+        </a:xfrm>
+      </p:grpSpPr>
+      <p:sp>
+        <p:nvSpPr>
+          <p:cNvPr id="2" name="Vertical Title 1"/>
+          <p:cNvSpPr>
+            <a:spLocks noGrp="1"/>
+          </p:cNvSpPr>
+          <p:nvPr>
+            <p:ph type="title" orient="vert"/>
+          </p:nvPr>
+        </p:nvSpPr>
+        <p:spPr>
+          <a:xfrm>
+            <a:off x="6629400" y="205979"/>
+            <a:ext cx="2057400" cy="4388644"/>
+          </a:xfrm>
+        </p:spPr>
+        <p:txBody>
+          <a:bodyPr vert="eaVert"/>
+          <a:lstStyle/>
+          <a:p>
+            <a:r>
+              <a:rPr lang="en-US"/>
+              <a:t>Click to edit Master title style</a:t>
+            </a:r>
+          </a:p>
+        </p:txBody>
+      </p:sp>
+      <p:sp>
+        <p:nvSpPr>
+          <p:cNvPr id="3" name="Vertical Text Placeholder 2"/>
+          <p:cNvSpPr>
+            <a:spLocks noGrp="1"/>
+          </p:cNvSpPr>
+          <p:nvPr>
+            <p:ph type="body" orient="vert" idx="1"/>
+          </p:nvPr>
+        </p:nvSpPr>
+        <p:spPr>
+          <a:xfrm>
+            <a:off x="457200" y="205979"/>
+            <a:ext cx="6019800" cy="4388644"/>
+          </a:xfrm>
+        </p:spPr>
+        <p:txBody>
+          <a:bodyPr vert="eaVert"/>
+          <a:lstStyle/>
+          <a:p>
+            <a:pPr lvl="0"/>
+            <a:r>
+              <a:rPr lang="en-US"/>
+              <a:t>Click to edit Master text styles</a:t>
+            </a:r>
+          </a:p>
+          <a:p>
+            <a:pPr lvl="1"/>
+            <a:r>
+              <a:rPr lang="en-US"/>
+              <a:t>Second level</a:t>
+            </a:r>
+          </a:p>
+          <a:p>
+            <a:pPr lvl="2"/>
+            <a:r>
+              <a:rPr lang="en-US"/>
+              <a:t>Third level</a:t>
+            </a:r>
+          </a:p>
+          <a:p>
+            <a:pPr lvl="3"/>
+            <a:r>
+              <a:rPr lang="en-US"/>
+              <a:t>Fourth level</a:t>
+            </a:r>
+          </a:p>
+          <a:p>
+            <a:pPr lvl="4"/>
+            <a:r>
+              <a:rPr lang="en-US"/>
+              <a:t>Fifth level</a:t>
+            </a:r>
+          </a:p>
+        </p:txBody>
+      </p:sp>
+      <p:sp>
+        <p:nvSpPr>
+          <p:cNvPr id="4" name="Date Placeholder 3"/>
+          <p:cNvSpPr>
+            <a:spLocks noGrp="1"/>
+          </p:cNvSpPr>
+          <p:nvPr>
+            <p:ph type="dt" sz="half" idx="10"/>
+          </p:nvPr>
+        </p:nvSpPr>
+        <p:spPr/>
+        <p:txBody>
+          <a:bodyPr/>
+          <a:lstStyle/>
+          <a:p>
+            <a:fld id="{241EB5C9-1307-BA42-ABA2-0BC069CD8E7F}" type="datetimeFigureOut">
+              <a:rPr lang="en-US" smtClean="0"/>
+              <a:t>1/2/22</a:t>
+            </a:fld>
+            <a:endParaRPr lang="en-US"/>
+          </a:p>
+        </p:txBody>
+      </p:sp>
+      <p:sp>
+        <p:nvSpPr>
+          <p:cNvPr id="5" name="Footer Placeholder 4"/>
+          <p:cNvSpPr>
+            <a:spLocks noGrp="1"/>
+          </p:cNvSpPr>
+          <p:nvPr>
+            <p:ph type="ftr" sz="quarter" idx="11"/>
+          </p:nvPr>
+        </p:nvSpPr>
+        <p:spPr/>
+        <p:txBody>
+          <a:bodyPr/>
+          <a:lstStyle/>
+          <a:p>
+            <a:endParaRPr lang="en-US"/>
+          </a:p>
+        </p:txBody>
+      </p:sp>
+      <p:sp>
+        <p:nvSpPr>
+          <p:cNvPr id="6" name="Slide Number Placeholder 5"/>
+          <p:cNvSpPr>
+            <a:spLocks noGrp="1"/>
+          </p:cNvSpPr>
+          <p:nvPr>
+            <p:ph type="sldNum" sz="quarter" idx="12"/>
+          </p:nvPr>
+        </p:nvSpPr>
+        <p:spPr/>
+        <p:txBody>
+          <a:bodyPr/>
+          <a:lstStyle/>
+          <a:p>
+            <a:fld id="{C5EF2332-01BF-834F-8236-50238282D533}" type="slidenum">
+              <a:rPr lang="en-US" smtClean="0"/>
+              <a:t>‹#›</a:t>
+            </a:fld>
+            <a:endParaRPr lang="en-US"/>
+          </a:p>
+        </p:txBody>
+      </p:sp>
+    </p:spTree>
+    <p:extLst>
+      <p:ext uri="{BB962C8B-B14F-4D97-AF65-F5344CB8AC3E}">
+        <p14:creationId xmlns:p14="http://schemas.microsoft.com/office/powerpoint/2010/main" val="2581529045"/>
+      </p:ext>
+    </p:extLst>
+  </p:cSld>
+  <p:clrMapOvr>
+    <a:masterClrMapping/>
+  </p:clrMapOvr>
+</p:sldLayout>
+</file>
+
+<file path=ppt/slideLayouts/slideLayout2.xml><?xml version="1.0" encoding="utf-8"?>
+<p:sldLayout xmlns:a="http://schemas.openxmlformats.org/drawingml/2006/main" xmlns:r="http://schemas.openxmlformats.org/officeDocument/2006/relationships" xmlns:p="http://schemas.openxmlformats.org/presentationml/2006/main" type="obj" preserve="1">
+  <p:cSld name="Title and Content">
+    <p:spTree>
+      <p:nvGrpSpPr>
+        <p:cNvPr id="1" name=""/>
+        <p:cNvGrpSpPr/>
+        <p:nvPr/>
+      </p:nvGrpSpPr>
+      <p:grpSpPr>
+        <a:xfrm>
+          <a:off x="0" y="0"/>
+          <a:ext cx="0" cy="0"/>
+          <a:chOff x="0" y="0"/>
+          <a:chExt cx="0" cy="0"/>
+        </a:xfrm>
+      </p:grpSpPr>
+      <p:sp>
+        <p:nvSpPr>
+          <p:cNvPr id="2" name="Title 1"/>
+          <p:cNvSpPr>
+            <a:spLocks noGrp="1"/>
+          </p:cNvSpPr>
+          <p:nvPr>
+            <p:ph type="title"/>
+          </p:nvPr>
+        </p:nvSpPr>
+        <p:spPr/>
+        <p:txBody>
+          <a:bodyPr/>
+          <a:lstStyle/>
+          <a:p>
+            <a:r>
+              <a:rPr lang="en-US"/>
+              <a:t>Click to edit Master title style</a:t>
             </a:r>
           </a:p>
         </p:txBody>
@@ -183,12 +1328,1798 @@
             <a:pPr lvl="0"/>
             <a:r>
               <a:rPr lang="en-US"/>
-              <a:t>Click to edit text</a:t>
-            </a:r>
+              <a:t>Click to edit Master text styles</a:t>
+            </a:r>
+          </a:p>
+          <a:p>
+            <a:pPr lvl="1"/>
+            <a:r>
+              <a:rPr lang="en-US"/>
+              <a:t>Second level</a:t>
+            </a:r>
+          </a:p>
+          <a:p>
+            <a:pPr lvl="2"/>
+            <a:r>
+              <a:rPr lang="en-US"/>
+              <a:t>Third level</a:t>
+            </a:r>
+          </a:p>
+          <a:p>
+            <a:pPr lvl="3"/>
+            <a:r>
+              <a:rPr lang="en-US"/>
+              <a:t>Fourth level</a:t>
+            </a:r>
+          </a:p>
+          <a:p>
+            <a:pPr lvl="4"/>
+            <a:r>
+              <a:rPr lang="en-US"/>
+              <a:t>Fifth level</a:t>
+            </a:r>
+          </a:p>
+        </p:txBody>
+      </p:sp>
+      <p:sp>
+        <p:nvSpPr>
+          <p:cNvPr id="4" name="Date Placeholder 3"/>
+          <p:cNvSpPr>
+            <a:spLocks noGrp="1"/>
+          </p:cNvSpPr>
+          <p:nvPr>
+            <p:ph type="dt" sz="half" idx="10"/>
+          </p:nvPr>
+        </p:nvSpPr>
+        <p:spPr/>
+        <p:txBody>
+          <a:bodyPr/>
+          <a:lstStyle/>
+          <a:p>
+            <a:fld id="{241EB5C9-1307-BA42-ABA2-0BC069CD8E7F}" type="datetimeFigureOut">
+              <a:rPr lang="en-US" smtClean="0"/>
+              <a:t>1/2/22</a:t>
+            </a:fld>
+            <a:endParaRPr lang="en-US"/>
+          </a:p>
+        </p:txBody>
+      </p:sp>
+      <p:sp>
+        <p:nvSpPr>
+          <p:cNvPr id="5" name="Footer Placeholder 4"/>
+          <p:cNvSpPr>
+            <a:spLocks noGrp="1"/>
+          </p:cNvSpPr>
+          <p:nvPr>
+            <p:ph type="ftr" sz="quarter" idx="11"/>
+          </p:nvPr>
+        </p:nvSpPr>
+        <p:spPr/>
+        <p:txBody>
+          <a:bodyPr/>
+          <a:lstStyle/>
+          <a:p>
+            <a:endParaRPr lang="en-US"/>
+          </a:p>
+        </p:txBody>
+      </p:sp>
+      <p:sp>
+        <p:nvSpPr>
+          <p:cNvPr id="6" name="Slide Number Placeholder 5"/>
+          <p:cNvSpPr>
+            <a:spLocks noGrp="1"/>
+          </p:cNvSpPr>
+          <p:nvPr>
+            <p:ph type="sldNum" sz="quarter" idx="12"/>
+          </p:nvPr>
+        </p:nvSpPr>
+        <p:spPr/>
+        <p:txBody>
+          <a:bodyPr/>
+          <a:lstStyle/>
+          <a:p>
+            <a:fld id="{C5EF2332-01BF-834F-8236-50238282D533}" type="slidenum">
+              <a:rPr lang="en-US" smtClean="0"/>
+              <a:t>‹#›</a:t>
+            </a:fld>
+            <a:endParaRPr lang="en-US"/>
           </a:p>
         </p:txBody>
       </p:sp>
     </p:spTree>
+    <p:extLst>
+      <p:ext uri="{BB962C8B-B14F-4D97-AF65-F5344CB8AC3E}">
+        <p14:creationId xmlns:p14="http://schemas.microsoft.com/office/powerpoint/2010/main" val="338346009"/>
+      </p:ext>
+    </p:extLst>
+  </p:cSld>
+  <p:clrMapOvr>
+    <a:masterClrMapping/>
+  </p:clrMapOvr>
+</p:sldLayout>
+</file>
+
+<file path=ppt/slideLayouts/slideLayout3.xml><?xml version="1.0" encoding="utf-8"?>
+<p:sldLayout xmlns:a="http://schemas.openxmlformats.org/drawingml/2006/main" xmlns:r="http://schemas.openxmlformats.org/officeDocument/2006/relationships" xmlns:p="http://schemas.openxmlformats.org/presentationml/2006/main" type="secHead" preserve="1">
+  <p:cSld name="Section Header">
+    <p:spTree>
+      <p:nvGrpSpPr>
+        <p:cNvPr id="1" name=""/>
+        <p:cNvGrpSpPr/>
+        <p:nvPr/>
+      </p:nvGrpSpPr>
+      <p:grpSpPr>
+        <a:xfrm>
+          <a:off x="0" y="0"/>
+          <a:ext cx="0" cy="0"/>
+          <a:chOff x="0" y="0"/>
+          <a:chExt cx="0" cy="0"/>
+        </a:xfrm>
+      </p:grpSpPr>
+      <p:sp>
+        <p:nvSpPr>
+          <p:cNvPr id="2" name="Title 1"/>
+          <p:cNvSpPr>
+            <a:spLocks noGrp="1"/>
+          </p:cNvSpPr>
+          <p:nvPr>
+            <p:ph type="title"/>
+          </p:nvPr>
+        </p:nvSpPr>
+        <p:spPr>
+          <a:xfrm>
+            <a:off x="722313" y="3305176"/>
+            <a:ext cx="7772400" cy="1021556"/>
+          </a:xfrm>
+        </p:spPr>
+        <p:txBody>
+          <a:bodyPr anchor="t"/>
+          <a:lstStyle>
+            <a:lvl1pPr algn="l">
+              <a:defRPr sz="3000" b="1" cap="all"/>
+            </a:lvl1pPr>
+          </a:lstStyle>
+          <a:p>
+            <a:r>
+              <a:rPr lang="en-US"/>
+              <a:t>Click to edit Master title style</a:t>
+            </a:r>
+          </a:p>
+        </p:txBody>
+      </p:sp>
+      <p:sp>
+        <p:nvSpPr>
+          <p:cNvPr id="3" name="Text Placeholder 2"/>
+          <p:cNvSpPr>
+            <a:spLocks noGrp="1"/>
+          </p:cNvSpPr>
+          <p:nvPr>
+            <p:ph type="body" idx="1"/>
+          </p:nvPr>
+        </p:nvSpPr>
+        <p:spPr>
+          <a:xfrm>
+            <a:off x="722313" y="2180035"/>
+            <a:ext cx="7772400" cy="1125140"/>
+          </a:xfrm>
+        </p:spPr>
+        <p:txBody>
+          <a:bodyPr anchor="b"/>
+          <a:lstStyle>
+            <a:lvl1pPr marL="0" indent="0">
+              <a:buNone/>
+              <a:defRPr sz="1500">
+                <a:solidFill>
+                  <a:schemeClr val="tx1">
+                    <a:tint val="75000"/>
+                  </a:schemeClr>
+                </a:solidFill>
+              </a:defRPr>
+            </a:lvl1pPr>
+            <a:lvl2pPr marL="342900" indent="0">
+              <a:buNone/>
+              <a:defRPr sz="1350">
+                <a:solidFill>
+                  <a:schemeClr val="tx1">
+                    <a:tint val="75000"/>
+                  </a:schemeClr>
+                </a:solidFill>
+              </a:defRPr>
+            </a:lvl2pPr>
+            <a:lvl3pPr marL="685800" indent="0">
+              <a:buNone/>
+              <a:defRPr sz="1200">
+                <a:solidFill>
+                  <a:schemeClr val="tx1">
+                    <a:tint val="75000"/>
+                  </a:schemeClr>
+                </a:solidFill>
+              </a:defRPr>
+            </a:lvl3pPr>
+            <a:lvl4pPr marL="1028700" indent="0">
+              <a:buNone/>
+              <a:defRPr sz="1050">
+                <a:solidFill>
+                  <a:schemeClr val="tx1">
+                    <a:tint val="75000"/>
+                  </a:schemeClr>
+                </a:solidFill>
+              </a:defRPr>
+            </a:lvl4pPr>
+            <a:lvl5pPr marL="1371600" indent="0">
+              <a:buNone/>
+              <a:defRPr sz="1050">
+                <a:solidFill>
+                  <a:schemeClr val="tx1">
+                    <a:tint val="75000"/>
+                  </a:schemeClr>
+                </a:solidFill>
+              </a:defRPr>
+            </a:lvl5pPr>
+            <a:lvl6pPr marL="1714500" indent="0">
+              <a:buNone/>
+              <a:defRPr sz="1050">
+                <a:solidFill>
+                  <a:schemeClr val="tx1">
+                    <a:tint val="75000"/>
+                  </a:schemeClr>
+                </a:solidFill>
+              </a:defRPr>
+            </a:lvl6pPr>
+            <a:lvl7pPr marL="2057400" indent="0">
+              <a:buNone/>
+              <a:defRPr sz="1050">
+                <a:solidFill>
+                  <a:schemeClr val="tx1">
+                    <a:tint val="75000"/>
+                  </a:schemeClr>
+                </a:solidFill>
+              </a:defRPr>
+            </a:lvl7pPr>
+            <a:lvl8pPr marL="2400300" indent="0">
+              <a:buNone/>
+              <a:defRPr sz="1050">
+                <a:solidFill>
+                  <a:schemeClr val="tx1">
+                    <a:tint val="75000"/>
+                  </a:schemeClr>
+                </a:solidFill>
+              </a:defRPr>
+            </a:lvl8pPr>
+            <a:lvl9pPr marL="2743200" indent="0">
+              <a:buNone/>
+              <a:defRPr sz="1050">
+                <a:solidFill>
+                  <a:schemeClr val="tx1">
+                    <a:tint val="75000"/>
+                  </a:schemeClr>
+                </a:solidFill>
+              </a:defRPr>
+            </a:lvl9pPr>
+          </a:lstStyle>
+          <a:p>
+            <a:pPr lvl="0"/>
+            <a:r>
+              <a:rPr lang="en-US"/>
+              <a:t>Click to edit Master text styles</a:t>
+            </a:r>
+          </a:p>
+        </p:txBody>
+      </p:sp>
+      <p:sp>
+        <p:nvSpPr>
+          <p:cNvPr id="4" name="Date Placeholder 3"/>
+          <p:cNvSpPr>
+            <a:spLocks noGrp="1"/>
+          </p:cNvSpPr>
+          <p:nvPr>
+            <p:ph type="dt" sz="half" idx="10"/>
+          </p:nvPr>
+        </p:nvSpPr>
+        <p:spPr/>
+        <p:txBody>
+          <a:bodyPr/>
+          <a:lstStyle/>
+          <a:p>
+            <a:fld id="{241EB5C9-1307-BA42-ABA2-0BC069CD8E7F}" type="datetimeFigureOut">
+              <a:rPr lang="en-US" smtClean="0"/>
+              <a:t>1/2/22</a:t>
+            </a:fld>
+            <a:endParaRPr lang="en-US"/>
+          </a:p>
+        </p:txBody>
+      </p:sp>
+      <p:sp>
+        <p:nvSpPr>
+          <p:cNvPr id="5" name="Footer Placeholder 4"/>
+          <p:cNvSpPr>
+            <a:spLocks noGrp="1"/>
+          </p:cNvSpPr>
+          <p:nvPr>
+            <p:ph type="ftr" sz="quarter" idx="11"/>
+          </p:nvPr>
+        </p:nvSpPr>
+        <p:spPr/>
+        <p:txBody>
+          <a:bodyPr/>
+          <a:lstStyle/>
+          <a:p>
+            <a:endParaRPr lang="en-US"/>
+          </a:p>
+        </p:txBody>
+      </p:sp>
+      <p:sp>
+        <p:nvSpPr>
+          <p:cNvPr id="6" name="Slide Number Placeholder 5"/>
+          <p:cNvSpPr>
+            <a:spLocks noGrp="1"/>
+          </p:cNvSpPr>
+          <p:nvPr>
+            <p:ph type="sldNum" sz="quarter" idx="12"/>
+          </p:nvPr>
+        </p:nvSpPr>
+        <p:spPr/>
+        <p:txBody>
+          <a:bodyPr/>
+          <a:lstStyle/>
+          <a:p>
+            <a:fld id="{C5EF2332-01BF-834F-8236-50238282D533}" type="slidenum">
+              <a:rPr lang="en-US" smtClean="0"/>
+              <a:t>‹#›</a:t>
+            </a:fld>
+            <a:endParaRPr lang="en-US"/>
+          </a:p>
+        </p:txBody>
+      </p:sp>
+    </p:spTree>
+    <p:extLst>
+      <p:ext uri="{BB962C8B-B14F-4D97-AF65-F5344CB8AC3E}">
+        <p14:creationId xmlns:p14="http://schemas.microsoft.com/office/powerpoint/2010/main" val="1073069076"/>
+      </p:ext>
+    </p:extLst>
+  </p:cSld>
+  <p:clrMapOvr>
+    <a:masterClrMapping/>
+  </p:clrMapOvr>
+</p:sldLayout>
+</file>
+
+<file path=ppt/slideLayouts/slideLayout4.xml><?xml version="1.0" encoding="utf-8"?>
+<p:sldLayout xmlns:a="http://schemas.openxmlformats.org/drawingml/2006/main" xmlns:r="http://schemas.openxmlformats.org/officeDocument/2006/relationships" xmlns:p="http://schemas.openxmlformats.org/presentationml/2006/main" type="twoObj" preserve="1">
+  <p:cSld name="Two Content">
+    <p:spTree>
+      <p:nvGrpSpPr>
+        <p:cNvPr id="1" name=""/>
+        <p:cNvGrpSpPr/>
+        <p:nvPr/>
+      </p:nvGrpSpPr>
+      <p:grpSpPr>
+        <a:xfrm>
+          <a:off x="0" y="0"/>
+          <a:ext cx="0" cy="0"/>
+          <a:chOff x="0" y="0"/>
+          <a:chExt cx="0" cy="0"/>
+        </a:xfrm>
+      </p:grpSpPr>
+      <p:sp>
+        <p:nvSpPr>
+          <p:cNvPr id="2" name="Title 1"/>
+          <p:cNvSpPr>
+            <a:spLocks noGrp="1"/>
+          </p:cNvSpPr>
+          <p:nvPr>
+            <p:ph type="title"/>
+          </p:nvPr>
+        </p:nvSpPr>
+        <p:spPr/>
+        <p:txBody>
+          <a:bodyPr/>
+          <a:lstStyle/>
+          <a:p>
+            <a:r>
+              <a:rPr lang="en-US"/>
+              <a:t>Click to edit Master title style</a:t>
+            </a:r>
+          </a:p>
+        </p:txBody>
+      </p:sp>
+      <p:sp>
+        <p:nvSpPr>
+          <p:cNvPr id="3" name="Content Placeholder 2"/>
+          <p:cNvSpPr>
+            <a:spLocks noGrp="1"/>
+          </p:cNvSpPr>
+          <p:nvPr>
+            <p:ph sz="half" idx="1"/>
+          </p:nvPr>
+        </p:nvSpPr>
+        <p:spPr>
+          <a:xfrm>
+            <a:off x="457200" y="1200151"/>
+            <a:ext cx="4038600" cy="3394472"/>
+          </a:xfrm>
+        </p:spPr>
+        <p:txBody>
+          <a:bodyPr/>
+          <a:lstStyle>
+            <a:lvl1pPr>
+              <a:defRPr sz="2100"/>
+            </a:lvl1pPr>
+            <a:lvl2pPr>
+              <a:defRPr sz="1800"/>
+            </a:lvl2pPr>
+            <a:lvl3pPr>
+              <a:defRPr sz="1500"/>
+            </a:lvl3pPr>
+            <a:lvl4pPr>
+              <a:defRPr sz="1350"/>
+            </a:lvl4pPr>
+            <a:lvl5pPr>
+              <a:defRPr sz="1350"/>
+            </a:lvl5pPr>
+            <a:lvl6pPr>
+              <a:defRPr sz="1350"/>
+            </a:lvl6pPr>
+            <a:lvl7pPr>
+              <a:defRPr sz="1350"/>
+            </a:lvl7pPr>
+            <a:lvl8pPr>
+              <a:defRPr sz="1350"/>
+            </a:lvl8pPr>
+            <a:lvl9pPr>
+              <a:defRPr sz="1350"/>
+            </a:lvl9pPr>
+          </a:lstStyle>
+          <a:p>
+            <a:pPr lvl="0"/>
+            <a:r>
+              <a:rPr lang="en-US"/>
+              <a:t>Click to edit Master text styles</a:t>
+            </a:r>
+          </a:p>
+          <a:p>
+            <a:pPr lvl="1"/>
+            <a:r>
+              <a:rPr lang="en-US"/>
+              <a:t>Second level</a:t>
+            </a:r>
+          </a:p>
+          <a:p>
+            <a:pPr lvl="2"/>
+            <a:r>
+              <a:rPr lang="en-US"/>
+              <a:t>Third level</a:t>
+            </a:r>
+          </a:p>
+          <a:p>
+            <a:pPr lvl="3"/>
+            <a:r>
+              <a:rPr lang="en-US"/>
+              <a:t>Fourth level</a:t>
+            </a:r>
+          </a:p>
+          <a:p>
+            <a:pPr lvl="4"/>
+            <a:r>
+              <a:rPr lang="en-US"/>
+              <a:t>Fifth level</a:t>
+            </a:r>
+          </a:p>
+        </p:txBody>
+      </p:sp>
+      <p:sp>
+        <p:nvSpPr>
+          <p:cNvPr id="4" name="Content Placeholder 3"/>
+          <p:cNvSpPr>
+            <a:spLocks noGrp="1"/>
+          </p:cNvSpPr>
+          <p:nvPr>
+            <p:ph sz="half" idx="2"/>
+          </p:nvPr>
+        </p:nvSpPr>
+        <p:spPr>
+          <a:xfrm>
+            <a:off x="4648200" y="1200151"/>
+            <a:ext cx="4038600" cy="3394472"/>
+          </a:xfrm>
+        </p:spPr>
+        <p:txBody>
+          <a:bodyPr/>
+          <a:lstStyle>
+            <a:lvl1pPr>
+              <a:defRPr sz="2100"/>
+            </a:lvl1pPr>
+            <a:lvl2pPr>
+              <a:defRPr sz="1800"/>
+            </a:lvl2pPr>
+            <a:lvl3pPr>
+              <a:defRPr sz="1500"/>
+            </a:lvl3pPr>
+            <a:lvl4pPr>
+              <a:defRPr sz="1350"/>
+            </a:lvl4pPr>
+            <a:lvl5pPr>
+              <a:defRPr sz="1350"/>
+            </a:lvl5pPr>
+            <a:lvl6pPr>
+              <a:defRPr sz="1350"/>
+            </a:lvl6pPr>
+            <a:lvl7pPr>
+              <a:defRPr sz="1350"/>
+            </a:lvl7pPr>
+            <a:lvl8pPr>
+              <a:defRPr sz="1350"/>
+            </a:lvl8pPr>
+            <a:lvl9pPr>
+              <a:defRPr sz="1350"/>
+            </a:lvl9pPr>
+          </a:lstStyle>
+          <a:p>
+            <a:pPr lvl="0"/>
+            <a:r>
+              <a:rPr lang="en-US"/>
+              <a:t>Click to edit Master text styles</a:t>
+            </a:r>
+          </a:p>
+          <a:p>
+            <a:pPr lvl="1"/>
+            <a:r>
+              <a:rPr lang="en-US"/>
+              <a:t>Second level</a:t>
+            </a:r>
+          </a:p>
+          <a:p>
+            <a:pPr lvl="2"/>
+            <a:r>
+              <a:rPr lang="en-US"/>
+              <a:t>Third level</a:t>
+            </a:r>
+          </a:p>
+          <a:p>
+            <a:pPr lvl="3"/>
+            <a:r>
+              <a:rPr lang="en-US"/>
+              <a:t>Fourth level</a:t>
+            </a:r>
+          </a:p>
+          <a:p>
+            <a:pPr lvl="4"/>
+            <a:r>
+              <a:rPr lang="en-US"/>
+              <a:t>Fifth level</a:t>
+            </a:r>
+          </a:p>
+        </p:txBody>
+      </p:sp>
+      <p:sp>
+        <p:nvSpPr>
+          <p:cNvPr id="5" name="Date Placeholder 4"/>
+          <p:cNvSpPr>
+            <a:spLocks noGrp="1"/>
+          </p:cNvSpPr>
+          <p:nvPr>
+            <p:ph type="dt" sz="half" idx="10"/>
+          </p:nvPr>
+        </p:nvSpPr>
+        <p:spPr/>
+        <p:txBody>
+          <a:bodyPr/>
+          <a:lstStyle/>
+          <a:p>
+            <a:fld id="{241EB5C9-1307-BA42-ABA2-0BC069CD8E7F}" type="datetimeFigureOut">
+              <a:rPr lang="en-US" smtClean="0"/>
+              <a:t>1/2/22</a:t>
+            </a:fld>
+            <a:endParaRPr lang="en-US"/>
+          </a:p>
+        </p:txBody>
+      </p:sp>
+      <p:sp>
+        <p:nvSpPr>
+          <p:cNvPr id="6" name="Footer Placeholder 5"/>
+          <p:cNvSpPr>
+            <a:spLocks noGrp="1"/>
+          </p:cNvSpPr>
+          <p:nvPr>
+            <p:ph type="ftr" sz="quarter" idx="11"/>
+          </p:nvPr>
+        </p:nvSpPr>
+        <p:spPr/>
+        <p:txBody>
+          <a:bodyPr/>
+          <a:lstStyle/>
+          <a:p>
+            <a:endParaRPr lang="en-US"/>
+          </a:p>
+        </p:txBody>
+      </p:sp>
+      <p:sp>
+        <p:nvSpPr>
+          <p:cNvPr id="7" name="Slide Number Placeholder 6"/>
+          <p:cNvSpPr>
+            <a:spLocks noGrp="1"/>
+          </p:cNvSpPr>
+          <p:nvPr>
+            <p:ph type="sldNum" sz="quarter" idx="12"/>
+          </p:nvPr>
+        </p:nvSpPr>
+        <p:spPr/>
+        <p:txBody>
+          <a:bodyPr/>
+          <a:lstStyle/>
+          <a:p>
+            <a:fld id="{C5EF2332-01BF-834F-8236-50238282D533}" type="slidenum">
+              <a:rPr lang="en-US" smtClean="0"/>
+              <a:t>‹#›</a:t>
+            </a:fld>
+            <a:endParaRPr lang="en-US"/>
+          </a:p>
+        </p:txBody>
+      </p:sp>
+    </p:spTree>
+    <p:extLst>
+      <p:ext uri="{BB962C8B-B14F-4D97-AF65-F5344CB8AC3E}">
+        <p14:creationId xmlns:p14="http://schemas.microsoft.com/office/powerpoint/2010/main" val="2619886245"/>
+      </p:ext>
+    </p:extLst>
+  </p:cSld>
+  <p:clrMapOvr>
+    <a:masterClrMapping/>
+  </p:clrMapOvr>
+</p:sldLayout>
+</file>
+
+<file path=ppt/slideLayouts/slideLayout5.xml><?xml version="1.0" encoding="utf-8"?>
+<p:sldLayout xmlns:a="http://schemas.openxmlformats.org/drawingml/2006/main" xmlns:r="http://schemas.openxmlformats.org/officeDocument/2006/relationships" xmlns:p="http://schemas.openxmlformats.org/presentationml/2006/main" type="twoTxTwoObj" preserve="1">
+  <p:cSld name="Comparison">
+    <p:spTree>
+      <p:nvGrpSpPr>
+        <p:cNvPr id="1" name=""/>
+        <p:cNvGrpSpPr/>
+        <p:nvPr/>
+      </p:nvGrpSpPr>
+      <p:grpSpPr>
+        <a:xfrm>
+          <a:off x="0" y="0"/>
+          <a:ext cx="0" cy="0"/>
+          <a:chOff x="0" y="0"/>
+          <a:chExt cx="0" cy="0"/>
+        </a:xfrm>
+      </p:grpSpPr>
+      <p:sp>
+        <p:nvSpPr>
+          <p:cNvPr id="2" name="Title 1"/>
+          <p:cNvSpPr>
+            <a:spLocks noGrp="1"/>
+          </p:cNvSpPr>
+          <p:nvPr>
+            <p:ph type="title"/>
+          </p:nvPr>
+        </p:nvSpPr>
+        <p:spPr/>
+        <p:txBody>
+          <a:bodyPr/>
+          <a:lstStyle>
+            <a:lvl1pPr>
+              <a:defRPr/>
+            </a:lvl1pPr>
+          </a:lstStyle>
+          <a:p>
+            <a:r>
+              <a:rPr lang="en-US"/>
+              <a:t>Click to edit Master title style</a:t>
+            </a:r>
+          </a:p>
+        </p:txBody>
+      </p:sp>
+      <p:sp>
+        <p:nvSpPr>
+          <p:cNvPr id="3" name="Text Placeholder 2"/>
+          <p:cNvSpPr>
+            <a:spLocks noGrp="1"/>
+          </p:cNvSpPr>
+          <p:nvPr>
+            <p:ph type="body" idx="1"/>
+          </p:nvPr>
+        </p:nvSpPr>
+        <p:spPr>
+          <a:xfrm>
+            <a:off x="457200" y="1151335"/>
+            <a:ext cx="4040188" cy="479822"/>
+          </a:xfrm>
+        </p:spPr>
+        <p:txBody>
+          <a:bodyPr anchor="b"/>
+          <a:lstStyle>
+            <a:lvl1pPr marL="0" indent="0">
+              <a:buNone/>
+              <a:defRPr sz="1800" b="1"/>
+            </a:lvl1pPr>
+            <a:lvl2pPr marL="342900" indent="0">
+              <a:buNone/>
+              <a:defRPr sz="1500" b="1"/>
+            </a:lvl2pPr>
+            <a:lvl3pPr marL="685800" indent="0">
+              <a:buNone/>
+              <a:defRPr sz="1350" b="1"/>
+            </a:lvl3pPr>
+            <a:lvl4pPr marL="1028700" indent="0">
+              <a:buNone/>
+              <a:defRPr sz="1200" b="1"/>
+            </a:lvl4pPr>
+            <a:lvl5pPr marL="1371600" indent="0">
+              <a:buNone/>
+              <a:defRPr sz="1200" b="1"/>
+            </a:lvl5pPr>
+            <a:lvl6pPr marL="1714500" indent="0">
+              <a:buNone/>
+              <a:defRPr sz="1200" b="1"/>
+            </a:lvl6pPr>
+            <a:lvl7pPr marL="2057400" indent="0">
+              <a:buNone/>
+              <a:defRPr sz="1200" b="1"/>
+            </a:lvl7pPr>
+            <a:lvl8pPr marL="2400300" indent="0">
+              <a:buNone/>
+              <a:defRPr sz="1200" b="1"/>
+            </a:lvl8pPr>
+            <a:lvl9pPr marL="2743200" indent="0">
+              <a:buNone/>
+              <a:defRPr sz="1200" b="1"/>
+            </a:lvl9pPr>
+          </a:lstStyle>
+          <a:p>
+            <a:pPr lvl="0"/>
+            <a:r>
+              <a:rPr lang="en-US"/>
+              <a:t>Click to edit Master text styles</a:t>
+            </a:r>
+          </a:p>
+        </p:txBody>
+      </p:sp>
+      <p:sp>
+        <p:nvSpPr>
+          <p:cNvPr id="4" name="Content Placeholder 3"/>
+          <p:cNvSpPr>
+            <a:spLocks noGrp="1"/>
+          </p:cNvSpPr>
+          <p:nvPr>
+            <p:ph sz="half" idx="2"/>
+          </p:nvPr>
+        </p:nvSpPr>
+        <p:spPr>
+          <a:xfrm>
+            <a:off x="457200" y="1631156"/>
+            <a:ext cx="4040188" cy="2963466"/>
+          </a:xfrm>
+        </p:spPr>
+        <p:txBody>
+          <a:bodyPr/>
+          <a:lstStyle>
+            <a:lvl1pPr>
+              <a:defRPr sz="1800"/>
+            </a:lvl1pPr>
+            <a:lvl2pPr>
+              <a:defRPr sz="1500"/>
+            </a:lvl2pPr>
+            <a:lvl3pPr>
+              <a:defRPr sz="1350"/>
+            </a:lvl3pPr>
+            <a:lvl4pPr>
+              <a:defRPr sz="1200"/>
+            </a:lvl4pPr>
+            <a:lvl5pPr>
+              <a:defRPr sz="1200"/>
+            </a:lvl5pPr>
+            <a:lvl6pPr>
+              <a:defRPr sz="1200"/>
+            </a:lvl6pPr>
+            <a:lvl7pPr>
+              <a:defRPr sz="1200"/>
+            </a:lvl7pPr>
+            <a:lvl8pPr>
+              <a:defRPr sz="1200"/>
+            </a:lvl8pPr>
+            <a:lvl9pPr>
+              <a:defRPr sz="1200"/>
+            </a:lvl9pPr>
+          </a:lstStyle>
+          <a:p>
+            <a:pPr lvl="0"/>
+            <a:r>
+              <a:rPr lang="en-US"/>
+              <a:t>Click to edit Master text styles</a:t>
+            </a:r>
+          </a:p>
+          <a:p>
+            <a:pPr lvl="1"/>
+            <a:r>
+              <a:rPr lang="en-US"/>
+              <a:t>Second level</a:t>
+            </a:r>
+          </a:p>
+          <a:p>
+            <a:pPr lvl="2"/>
+            <a:r>
+              <a:rPr lang="en-US"/>
+              <a:t>Third level</a:t>
+            </a:r>
+          </a:p>
+          <a:p>
+            <a:pPr lvl="3"/>
+            <a:r>
+              <a:rPr lang="en-US"/>
+              <a:t>Fourth level</a:t>
+            </a:r>
+          </a:p>
+          <a:p>
+            <a:pPr lvl="4"/>
+            <a:r>
+              <a:rPr lang="en-US"/>
+              <a:t>Fifth level</a:t>
+            </a:r>
+          </a:p>
+        </p:txBody>
+      </p:sp>
+      <p:sp>
+        <p:nvSpPr>
+          <p:cNvPr id="5" name="Text Placeholder 4"/>
+          <p:cNvSpPr>
+            <a:spLocks noGrp="1"/>
+          </p:cNvSpPr>
+          <p:nvPr>
+            <p:ph type="body" sz="quarter" idx="3"/>
+          </p:nvPr>
+        </p:nvSpPr>
+        <p:spPr>
+          <a:xfrm>
+            <a:off x="4645026" y="1151335"/>
+            <a:ext cx="4041775" cy="479822"/>
+          </a:xfrm>
+        </p:spPr>
+        <p:txBody>
+          <a:bodyPr anchor="b"/>
+          <a:lstStyle>
+            <a:lvl1pPr marL="0" indent="0">
+              <a:buNone/>
+              <a:defRPr sz="1800" b="1"/>
+            </a:lvl1pPr>
+            <a:lvl2pPr marL="342900" indent="0">
+              <a:buNone/>
+              <a:defRPr sz="1500" b="1"/>
+            </a:lvl2pPr>
+            <a:lvl3pPr marL="685800" indent="0">
+              <a:buNone/>
+              <a:defRPr sz="1350" b="1"/>
+            </a:lvl3pPr>
+            <a:lvl4pPr marL="1028700" indent="0">
+              <a:buNone/>
+              <a:defRPr sz="1200" b="1"/>
+            </a:lvl4pPr>
+            <a:lvl5pPr marL="1371600" indent="0">
+              <a:buNone/>
+              <a:defRPr sz="1200" b="1"/>
+            </a:lvl5pPr>
+            <a:lvl6pPr marL="1714500" indent="0">
+              <a:buNone/>
+              <a:defRPr sz="1200" b="1"/>
+            </a:lvl6pPr>
+            <a:lvl7pPr marL="2057400" indent="0">
+              <a:buNone/>
+              <a:defRPr sz="1200" b="1"/>
+            </a:lvl7pPr>
+            <a:lvl8pPr marL="2400300" indent="0">
+              <a:buNone/>
+              <a:defRPr sz="1200" b="1"/>
+            </a:lvl8pPr>
+            <a:lvl9pPr marL="2743200" indent="0">
+              <a:buNone/>
+              <a:defRPr sz="1200" b="1"/>
+            </a:lvl9pPr>
+          </a:lstStyle>
+          <a:p>
+            <a:pPr lvl="0"/>
+            <a:r>
+              <a:rPr lang="en-US"/>
+              <a:t>Click to edit Master text styles</a:t>
+            </a:r>
+          </a:p>
+        </p:txBody>
+      </p:sp>
+      <p:sp>
+        <p:nvSpPr>
+          <p:cNvPr id="6" name="Content Placeholder 5"/>
+          <p:cNvSpPr>
+            <a:spLocks noGrp="1"/>
+          </p:cNvSpPr>
+          <p:nvPr>
+            <p:ph sz="quarter" idx="4"/>
+          </p:nvPr>
+        </p:nvSpPr>
+        <p:spPr>
+          <a:xfrm>
+            <a:off x="4645026" y="1631156"/>
+            <a:ext cx="4041775" cy="2963466"/>
+          </a:xfrm>
+        </p:spPr>
+        <p:txBody>
+          <a:bodyPr/>
+          <a:lstStyle>
+            <a:lvl1pPr>
+              <a:defRPr sz="1800"/>
+            </a:lvl1pPr>
+            <a:lvl2pPr>
+              <a:defRPr sz="1500"/>
+            </a:lvl2pPr>
+            <a:lvl3pPr>
+              <a:defRPr sz="1350"/>
+            </a:lvl3pPr>
+            <a:lvl4pPr>
+              <a:defRPr sz="1200"/>
+            </a:lvl4pPr>
+            <a:lvl5pPr>
+              <a:defRPr sz="1200"/>
+            </a:lvl5pPr>
+            <a:lvl6pPr>
+              <a:defRPr sz="1200"/>
+            </a:lvl6pPr>
+            <a:lvl7pPr>
+              <a:defRPr sz="1200"/>
+            </a:lvl7pPr>
+            <a:lvl8pPr>
+              <a:defRPr sz="1200"/>
+            </a:lvl8pPr>
+            <a:lvl9pPr>
+              <a:defRPr sz="1200"/>
+            </a:lvl9pPr>
+          </a:lstStyle>
+          <a:p>
+            <a:pPr lvl="0"/>
+            <a:r>
+              <a:rPr lang="en-US"/>
+              <a:t>Click to edit Master text styles</a:t>
+            </a:r>
+          </a:p>
+          <a:p>
+            <a:pPr lvl="1"/>
+            <a:r>
+              <a:rPr lang="en-US"/>
+              <a:t>Second level</a:t>
+            </a:r>
+          </a:p>
+          <a:p>
+            <a:pPr lvl="2"/>
+            <a:r>
+              <a:rPr lang="en-US"/>
+              <a:t>Third level</a:t>
+            </a:r>
+          </a:p>
+          <a:p>
+            <a:pPr lvl="3"/>
+            <a:r>
+              <a:rPr lang="en-US"/>
+              <a:t>Fourth level</a:t>
+            </a:r>
+          </a:p>
+          <a:p>
+            <a:pPr lvl="4"/>
+            <a:r>
+              <a:rPr lang="en-US"/>
+              <a:t>Fifth level</a:t>
+            </a:r>
+          </a:p>
+        </p:txBody>
+      </p:sp>
+      <p:sp>
+        <p:nvSpPr>
+          <p:cNvPr id="7" name="Date Placeholder 6"/>
+          <p:cNvSpPr>
+            <a:spLocks noGrp="1"/>
+          </p:cNvSpPr>
+          <p:nvPr>
+            <p:ph type="dt" sz="half" idx="10"/>
+          </p:nvPr>
+        </p:nvSpPr>
+        <p:spPr/>
+        <p:txBody>
+          <a:bodyPr/>
+          <a:lstStyle/>
+          <a:p>
+            <a:fld id="{241EB5C9-1307-BA42-ABA2-0BC069CD8E7F}" type="datetimeFigureOut">
+              <a:rPr lang="en-US" smtClean="0"/>
+              <a:t>1/2/22</a:t>
+            </a:fld>
+            <a:endParaRPr lang="en-US"/>
+          </a:p>
+        </p:txBody>
+      </p:sp>
+      <p:sp>
+        <p:nvSpPr>
+          <p:cNvPr id="8" name="Footer Placeholder 7"/>
+          <p:cNvSpPr>
+            <a:spLocks noGrp="1"/>
+          </p:cNvSpPr>
+          <p:nvPr>
+            <p:ph type="ftr" sz="quarter" idx="11"/>
+          </p:nvPr>
+        </p:nvSpPr>
+        <p:spPr/>
+        <p:txBody>
+          <a:bodyPr/>
+          <a:lstStyle/>
+          <a:p>
+            <a:endParaRPr lang="en-US"/>
+          </a:p>
+        </p:txBody>
+      </p:sp>
+      <p:sp>
+        <p:nvSpPr>
+          <p:cNvPr id="9" name="Slide Number Placeholder 8"/>
+          <p:cNvSpPr>
+            <a:spLocks noGrp="1"/>
+          </p:cNvSpPr>
+          <p:nvPr>
+            <p:ph type="sldNum" sz="quarter" idx="12"/>
+          </p:nvPr>
+        </p:nvSpPr>
+        <p:spPr/>
+        <p:txBody>
+          <a:bodyPr/>
+          <a:lstStyle/>
+          <a:p>
+            <a:fld id="{C5EF2332-01BF-834F-8236-50238282D533}" type="slidenum">
+              <a:rPr lang="en-US" smtClean="0"/>
+              <a:t>‹#›</a:t>
+            </a:fld>
+            <a:endParaRPr lang="en-US"/>
+          </a:p>
+        </p:txBody>
+      </p:sp>
+    </p:spTree>
+    <p:extLst>
+      <p:ext uri="{BB962C8B-B14F-4D97-AF65-F5344CB8AC3E}">
+        <p14:creationId xmlns:p14="http://schemas.microsoft.com/office/powerpoint/2010/main" val="2535793967"/>
+      </p:ext>
+    </p:extLst>
+  </p:cSld>
+  <p:clrMapOvr>
+    <a:masterClrMapping/>
+  </p:clrMapOvr>
+</p:sldLayout>
+</file>
+
+<file path=ppt/slideLayouts/slideLayout6.xml><?xml version="1.0" encoding="utf-8"?>
+<p:sldLayout xmlns:a="http://schemas.openxmlformats.org/drawingml/2006/main" xmlns:r="http://schemas.openxmlformats.org/officeDocument/2006/relationships" xmlns:p="http://schemas.openxmlformats.org/presentationml/2006/main" type="titleOnly" preserve="1">
+  <p:cSld name="Title Only">
+    <p:spTree>
+      <p:nvGrpSpPr>
+        <p:cNvPr id="1" name=""/>
+        <p:cNvGrpSpPr/>
+        <p:nvPr/>
+      </p:nvGrpSpPr>
+      <p:grpSpPr>
+        <a:xfrm>
+          <a:off x="0" y="0"/>
+          <a:ext cx="0" cy="0"/>
+          <a:chOff x="0" y="0"/>
+          <a:chExt cx="0" cy="0"/>
+        </a:xfrm>
+      </p:grpSpPr>
+      <p:sp>
+        <p:nvSpPr>
+          <p:cNvPr id="2" name="Title 1"/>
+          <p:cNvSpPr>
+            <a:spLocks noGrp="1"/>
+          </p:cNvSpPr>
+          <p:nvPr>
+            <p:ph type="title"/>
+          </p:nvPr>
+        </p:nvSpPr>
+        <p:spPr/>
+        <p:txBody>
+          <a:bodyPr/>
+          <a:lstStyle/>
+          <a:p>
+            <a:r>
+              <a:rPr lang="en-US"/>
+              <a:t>Click to edit Master title style</a:t>
+            </a:r>
+          </a:p>
+        </p:txBody>
+      </p:sp>
+      <p:sp>
+        <p:nvSpPr>
+          <p:cNvPr id="3" name="Date Placeholder 2"/>
+          <p:cNvSpPr>
+            <a:spLocks noGrp="1"/>
+          </p:cNvSpPr>
+          <p:nvPr>
+            <p:ph type="dt" sz="half" idx="10"/>
+          </p:nvPr>
+        </p:nvSpPr>
+        <p:spPr/>
+        <p:txBody>
+          <a:bodyPr/>
+          <a:lstStyle/>
+          <a:p>
+            <a:fld id="{241EB5C9-1307-BA42-ABA2-0BC069CD8E7F}" type="datetimeFigureOut">
+              <a:rPr lang="en-US" smtClean="0"/>
+              <a:t>1/2/22</a:t>
+            </a:fld>
+            <a:endParaRPr lang="en-US"/>
+          </a:p>
+        </p:txBody>
+      </p:sp>
+      <p:sp>
+        <p:nvSpPr>
+          <p:cNvPr id="4" name="Footer Placeholder 3"/>
+          <p:cNvSpPr>
+            <a:spLocks noGrp="1"/>
+          </p:cNvSpPr>
+          <p:nvPr>
+            <p:ph type="ftr" sz="quarter" idx="11"/>
+          </p:nvPr>
+        </p:nvSpPr>
+        <p:spPr/>
+        <p:txBody>
+          <a:bodyPr/>
+          <a:lstStyle/>
+          <a:p>
+            <a:endParaRPr lang="en-US"/>
+          </a:p>
+        </p:txBody>
+      </p:sp>
+      <p:sp>
+        <p:nvSpPr>
+          <p:cNvPr id="5" name="Slide Number Placeholder 4"/>
+          <p:cNvSpPr>
+            <a:spLocks noGrp="1"/>
+          </p:cNvSpPr>
+          <p:nvPr>
+            <p:ph type="sldNum" sz="quarter" idx="12"/>
+          </p:nvPr>
+        </p:nvSpPr>
+        <p:spPr/>
+        <p:txBody>
+          <a:bodyPr/>
+          <a:lstStyle/>
+          <a:p>
+            <a:fld id="{C5EF2332-01BF-834F-8236-50238282D533}" type="slidenum">
+              <a:rPr lang="en-US" smtClean="0"/>
+              <a:t>‹#›</a:t>
+            </a:fld>
+            <a:endParaRPr lang="en-US"/>
+          </a:p>
+        </p:txBody>
+      </p:sp>
+    </p:spTree>
+    <p:extLst>
+      <p:ext uri="{BB962C8B-B14F-4D97-AF65-F5344CB8AC3E}">
+        <p14:creationId xmlns:p14="http://schemas.microsoft.com/office/powerpoint/2010/main" val="3472721253"/>
+      </p:ext>
+    </p:extLst>
+  </p:cSld>
+  <p:clrMapOvr>
+    <a:masterClrMapping/>
+  </p:clrMapOvr>
+</p:sldLayout>
+</file>
+
+<file path=ppt/slideLayouts/slideLayout7.xml><?xml version="1.0" encoding="utf-8"?>
+<p:sldLayout xmlns:a="http://schemas.openxmlformats.org/drawingml/2006/main" xmlns:r="http://schemas.openxmlformats.org/officeDocument/2006/relationships" xmlns:p="http://schemas.openxmlformats.org/presentationml/2006/main" type="blank" preserve="1">
+  <p:cSld name="Blank">
+    <p:spTree>
+      <p:nvGrpSpPr>
+        <p:cNvPr id="1" name=""/>
+        <p:cNvGrpSpPr/>
+        <p:nvPr/>
+      </p:nvGrpSpPr>
+      <p:grpSpPr>
+        <a:xfrm>
+          <a:off x="0" y="0"/>
+          <a:ext cx="0" cy="0"/>
+          <a:chOff x="0" y="0"/>
+          <a:chExt cx="0" cy="0"/>
+        </a:xfrm>
+      </p:grpSpPr>
+      <p:sp>
+        <p:nvSpPr>
+          <p:cNvPr id="2" name="Date Placeholder 1"/>
+          <p:cNvSpPr>
+            <a:spLocks noGrp="1"/>
+          </p:cNvSpPr>
+          <p:nvPr>
+            <p:ph type="dt" sz="half" idx="10"/>
+          </p:nvPr>
+        </p:nvSpPr>
+        <p:spPr/>
+        <p:txBody>
+          <a:bodyPr/>
+          <a:lstStyle/>
+          <a:p>
+            <a:fld id="{241EB5C9-1307-BA42-ABA2-0BC069CD8E7F}" type="datetimeFigureOut">
+              <a:rPr lang="en-US" smtClean="0"/>
+              <a:t>1/2/22</a:t>
+            </a:fld>
+            <a:endParaRPr lang="en-US"/>
+          </a:p>
+        </p:txBody>
+      </p:sp>
+      <p:sp>
+        <p:nvSpPr>
+          <p:cNvPr id="3" name="Footer Placeholder 2"/>
+          <p:cNvSpPr>
+            <a:spLocks noGrp="1"/>
+          </p:cNvSpPr>
+          <p:nvPr>
+            <p:ph type="ftr" sz="quarter" idx="11"/>
+          </p:nvPr>
+        </p:nvSpPr>
+        <p:spPr/>
+        <p:txBody>
+          <a:bodyPr/>
+          <a:lstStyle/>
+          <a:p>
+            <a:endParaRPr lang="en-US"/>
+          </a:p>
+        </p:txBody>
+      </p:sp>
+      <p:sp>
+        <p:nvSpPr>
+          <p:cNvPr id="4" name="Slide Number Placeholder 3"/>
+          <p:cNvSpPr>
+            <a:spLocks noGrp="1"/>
+          </p:cNvSpPr>
+          <p:nvPr>
+            <p:ph type="sldNum" sz="quarter" idx="12"/>
+          </p:nvPr>
+        </p:nvSpPr>
+        <p:spPr/>
+        <p:txBody>
+          <a:bodyPr/>
+          <a:lstStyle/>
+          <a:p>
+            <a:fld id="{C5EF2332-01BF-834F-8236-50238282D533}" type="slidenum">
+              <a:rPr lang="en-US" smtClean="0"/>
+              <a:t>‹#›</a:t>
+            </a:fld>
+            <a:endParaRPr lang="en-US"/>
+          </a:p>
+        </p:txBody>
+      </p:sp>
+    </p:spTree>
+    <p:extLst>
+      <p:ext uri="{BB962C8B-B14F-4D97-AF65-F5344CB8AC3E}">
+        <p14:creationId xmlns:p14="http://schemas.microsoft.com/office/powerpoint/2010/main" val="2130901097"/>
+      </p:ext>
+    </p:extLst>
+  </p:cSld>
+  <p:clrMapOvr>
+    <a:masterClrMapping/>
+  </p:clrMapOvr>
+</p:sldLayout>
+</file>
+
+<file path=ppt/slideLayouts/slideLayout8.xml><?xml version="1.0" encoding="utf-8"?>
+<p:sldLayout xmlns:a="http://schemas.openxmlformats.org/drawingml/2006/main" xmlns:r="http://schemas.openxmlformats.org/officeDocument/2006/relationships" xmlns:p="http://schemas.openxmlformats.org/presentationml/2006/main" type="objTx" preserve="1">
+  <p:cSld name="Content with Caption">
+    <p:spTree>
+      <p:nvGrpSpPr>
+        <p:cNvPr id="1" name=""/>
+        <p:cNvGrpSpPr/>
+        <p:nvPr/>
+      </p:nvGrpSpPr>
+      <p:grpSpPr>
+        <a:xfrm>
+          <a:off x="0" y="0"/>
+          <a:ext cx="0" cy="0"/>
+          <a:chOff x="0" y="0"/>
+          <a:chExt cx="0" cy="0"/>
+        </a:xfrm>
+      </p:grpSpPr>
+      <p:sp>
+        <p:nvSpPr>
+          <p:cNvPr id="2" name="Title 1"/>
+          <p:cNvSpPr>
+            <a:spLocks noGrp="1"/>
+          </p:cNvSpPr>
+          <p:nvPr>
+            <p:ph type="title"/>
+          </p:nvPr>
+        </p:nvSpPr>
+        <p:spPr>
+          <a:xfrm>
+            <a:off x="457201" y="204787"/>
+            <a:ext cx="3008313" cy="871538"/>
+          </a:xfrm>
+        </p:spPr>
+        <p:txBody>
+          <a:bodyPr anchor="b"/>
+          <a:lstStyle>
+            <a:lvl1pPr algn="l">
+              <a:defRPr sz="1500" b="1"/>
+            </a:lvl1pPr>
+          </a:lstStyle>
+          <a:p>
+            <a:r>
+              <a:rPr lang="en-US"/>
+              <a:t>Click to edit Master title style</a:t>
+            </a:r>
+          </a:p>
+        </p:txBody>
+      </p:sp>
+      <p:sp>
+        <p:nvSpPr>
+          <p:cNvPr id="3" name="Content Placeholder 2"/>
+          <p:cNvSpPr>
+            <a:spLocks noGrp="1"/>
+          </p:cNvSpPr>
+          <p:nvPr>
+            <p:ph idx="1"/>
+          </p:nvPr>
+        </p:nvSpPr>
+        <p:spPr>
+          <a:xfrm>
+            <a:off x="3575050" y="204788"/>
+            <a:ext cx="5111750" cy="4389835"/>
+          </a:xfrm>
+        </p:spPr>
+        <p:txBody>
+          <a:bodyPr/>
+          <a:lstStyle>
+            <a:lvl1pPr>
+              <a:defRPr sz="2400"/>
+            </a:lvl1pPr>
+            <a:lvl2pPr>
+              <a:defRPr sz="2100"/>
+            </a:lvl2pPr>
+            <a:lvl3pPr>
+              <a:defRPr sz="1800"/>
+            </a:lvl3pPr>
+            <a:lvl4pPr>
+              <a:defRPr sz="1500"/>
+            </a:lvl4pPr>
+            <a:lvl5pPr>
+              <a:defRPr sz="1500"/>
+            </a:lvl5pPr>
+            <a:lvl6pPr>
+              <a:defRPr sz="1500"/>
+            </a:lvl6pPr>
+            <a:lvl7pPr>
+              <a:defRPr sz="1500"/>
+            </a:lvl7pPr>
+            <a:lvl8pPr>
+              <a:defRPr sz="1500"/>
+            </a:lvl8pPr>
+            <a:lvl9pPr>
+              <a:defRPr sz="1500"/>
+            </a:lvl9pPr>
+          </a:lstStyle>
+          <a:p>
+            <a:pPr lvl="0"/>
+            <a:r>
+              <a:rPr lang="en-US"/>
+              <a:t>Click to edit Master text styles</a:t>
+            </a:r>
+          </a:p>
+          <a:p>
+            <a:pPr lvl="1"/>
+            <a:r>
+              <a:rPr lang="en-US"/>
+              <a:t>Second level</a:t>
+            </a:r>
+          </a:p>
+          <a:p>
+            <a:pPr lvl="2"/>
+            <a:r>
+              <a:rPr lang="en-US"/>
+              <a:t>Third level</a:t>
+            </a:r>
+          </a:p>
+          <a:p>
+            <a:pPr lvl="3"/>
+            <a:r>
+              <a:rPr lang="en-US"/>
+              <a:t>Fourth level</a:t>
+            </a:r>
+          </a:p>
+          <a:p>
+            <a:pPr lvl="4"/>
+            <a:r>
+              <a:rPr lang="en-US"/>
+              <a:t>Fifth level</a:t>
+            </a:r>
+          </a:p>
+        </p:txBody>
+      </p:sp>
+      <p:sp>
+        <p:nvSpPr>
+          <p:cNvPr id="4" name="Text Placeholder 3"/>
+          <p:cNvSpPr>
+            <a:spLocks noGrp="1"/>
+          </p:cNvSpPr>
+          <p:nvPr>
+            <p:ph type="body" sz="half" idx="2"/>
+          </p:nvPr>
+        </p:nvSpPr>
+        <p:spPr>
+          <a:xfrm>
+            <a:off x="457201" y="1076326"/>
+            <a:ext cx="3008313" cy="3518297"/>
+          </a:xfrm>
+        </p:spPr>
+        <p:txBody>
+          <a:bodyPr/>
+          <a:lstStyle>
+            <a:lvl1pPr marL="0" indent="0">
+              <a:buNone/>
+              <a:defRPr sz="1050"/>
+            </a:lvl1pPr>
+            <a:lvl2pPr marL="342900" indent="0">
+              <a:buNone/>
+              <a:defRPr sz="900"/>
+            </a:lvl2pPr>
+            <a:lvl3pPr marL="685800" indent="0">
+              <a:buNone/>
+              <a:defRPr sz="750"/>
+            </a:lvl3pPr>
+            <a:lvl4pPr marL="1028700" indent="0">
+              <a:buNone/>
+              <a:defRPr sz="675"/>
+            </a:lvl4pPr>
+            <a:lvl5pPr marL="1371600" indent="0">
+              <a:buNone/>
+              <a:defRPr sz="675"/>
+            </a:lvl5pPr>
+            <a:lvl6pPr marL="1714500" indent="0">
+              <a:buNone/>
+              <a:defRPr sz="675"/>
+            </a:lvl6pPr>
+            <a:lvl7pPr marL="2057400" indent="0">
+              <a:buNone/>
+              <a:defRPr sz="675"/>
+            </a:lvl7pPr>
+            <a:lvl8pPr marL="2400300" indent="0">
+              <a:buNone/>
+              <a:defRPr sz="675"/>
+            </a:lvl8pPr>
+            <a:lvl9pPr marL="2743200" indent="0">
+              <a:buNone/>
+              <a:defRPr sz="675"/>
+            </a:lvl9pPr>
+          </a:lstStyle>
+          <a:p>
+            <a:pPr lvl="0"/>
+            <a:r>
+              <a:rPr lang="en-US"/>
+              <a:t>Click to edit Master text styles</a:t>
+            </a:r>
+          </a:p>
+        </p:txBody>
+      </p:sp>
+      <p:sp>
+        <p:nvSpPr>
+          <p:cNvPr id="5" name="Date Placeholder 4"/>
+          <p:cNvSpPr>
+            <a:spLocks noGrp="1"/>
+          </p:cNvSpPr>
+          <p:nvPr>
+            <p:ph type="dt" sz="half" idx="10"/>
+          </p:nvPr>
+        </p:nvSpPr>
+        <p:spPr/>
+        <p:txBody>
+          <a:bodyPr/>
+          <a:lstStyle/>
+          <a:p>
+            <a:fld id="{241EB5C9-1307-BA42-ABA2-0BC069CD8E7F}" type="datetimeFigureOut">
+              <a:rPr lang="en-US" smtClean="0"/>
+              <a:t>1/2/22</a:t>
+            </a:fld>
+            <a:endParaRPr lang="en-US"/>
+          </a:p>
+        </p:txBody>
+      </p:sp>
+      <p:sp>
+        <p:nvSpPr>
+          <p:cNvPr id="6" name="Footer Placeholder 5"/>
+          <p:cNvSpPr>
+            <a:spLocks noGrp="1"/>
+          </p:cNvSpPr>
+          <p:nvPr>
+            <p:ph type="ftr" sz="quarter" idx="11"/>
+          </p:nvPr>
+        </p:nvSpPr>
+        <p:spPr/>
+        <p:txBody>
+          <a:bodyPr/>
+          <a:lstStyle/>
+          <a:p>
+            <a:endParaRPr lang="en-US"/>
+          </a:p>
+        </p:txBody>
+      </p:sp>
+      <p:sp>
+        <p:nvSpPr>
+          <p:cNvPr id="7" name="Slide Number Placeholder 6"/>
+          <p:cNvSpPr>
+            <a:spLocks noGrp="1"/>
+          </p:cNvSpPr>
+          <p:nvPr>
+            <p:ph type="sldNum" sz="quarter" idx="12"/>
+          </p:nvPr>
+        </p:nvSpPr>
+        <p:spPr/>
+        <p:txBody>
+          <a:bodyPr/>
+          <a:lstStyle/>
+          <a:p>
+            <a:fld id="{C5EF2332-01BF-834F-8236-50238282D533}" type="slidenum">
+              <a:rPr lang="en-US" smtClean="0"/>
+              <a:t>‹#›</a:t>
+            </a:fld>
+            <a:endParaRPr lang="en-US"/>
+          </a:p>
+        </p:txBody>
+      </p:sp>
+    </p:spTree>
+    <p:extLst>
+      <p:ext uri="{BB962C8B-B14F-4D97-AF65-F5344CB8AC3E}">
+        <p14:creationId xmlns:p14="http://schemas.microsoft.com/office/powerpoint/2010/main" val="3540895647"/>
+      </p:ext>
+    </p:extLst>
+  </p:cSld>
+  <p:clrMapOvr>
+    <a:masterClrMapping/>
+  </p:clrMapOvr>
+</p:sldLayout>
+</file>
+
+<file path=ppt/slideLayouts/slideLayout9.xml><?xml version="1.0" encoding="utf-8"?>
+<p:sldLayout xmlns:a="http://schemas.openxmlformats.org/drawingml/2006/main" xmlns:r="http://schemas.openxmlformats.org/officeDocument/2006/relationships" xmlns:p="http://schemas.openxmlformats.org/presentationml/2006/main" type="picTx" preserve="1">
+  <p:cSld name="Picture with Caption">
+    <p:spTree>
+      <p:nvGrpSpPr>
+        <p:cNvPr id="1" name=""/>
+        <p:cNvGrpSpPr/>
+        <p:nvPr/>
+      </p:nvGrpSpPr>
+      <p:grpSpPr>
+        <a:xfrm>
+          <a:off x="0" y="0"/>
+          <a:ext cx="0" cy="0"/>
+          <a:chOff x="0" y="0"/>
+          <a:chExt cx="0" cy="0"/>
+        </a:xfrm>
+      </p:grpSpPr>
+      <p:sp>
+        <p:nvSpPr>
+          <p:cNvPr id="2" name="Title 1"/>
+          <p:cNvSpPr>
+            <a:spLocks noGrp="1"/>
+          </p:cNvSpPr>
+          <p:nvPr>
+            <p:ph type="title"/>
+          </p:nvPr>
+        </p:nvSpPr>
+        <p:spPr>
+          <a:xfrm>
+            <a:off x="1792288" y="3600450"/>
+            <a:ext cx="5486400" cy="425054"/>
+          </a:xfrm>
+        </p:spPr>
+        <p:txBody>
+          <a:bodyPr anchor="b"/>
+          <a:lstStyle>
+            <a:lvl1pPr algn="l">
+              <a:defRPr sz="1500" b="1"/>
+            </a:lvl1pPr>
+          </a:lstStyle>
+          <a:p>
+            <a:r>
+              <a:rPr lang="en-US"/>
+              <a:t>Click to edit Master title style</a:t>
+            </a:r>
+          </a:p>
+        </p:txBody>
+      </p:sp>
+      <p:sp>
+        <p:nvSpPr>
+          <p:cNvPr id="3" name="Picture Placeholder 2"/>
+          <p:cNvSpPr>
+            <a:spLocks noGrp="1"/>
+          </p:cNvSpPr>
+          <p:nvPr>
+            <p:ph type="pic" idx="1"/>
+          </p:nvPr>
+        </p:nvSpPr>
+        <p:spPr>
+          <a:xfrm>
+            <a:off x="1792288" y="459581"/>
+            <a:ext cx="5486400" cy="3086100"/>
+          </a:xfrm>
+        </p:spPr>
+        <p:txBody>
+          <a:bodyPr/>
+          <a:lstStyle>
+            <a:lvl1pPr marL="0" indent="0">
+              <a:buNone/>
+              <a:defRPr sz="2400"/>
+            </a:lvl1pPr>
+            <a:lvl2pPr marL="342900" indent="0">
+              <a:buNone/>
+              <a:defRPr sz="2100"/>
+            </a:lvl2pPr>
+            <a:lvl3pPr marL="685800" indent="0">
+              <a:buNone/>
+              <a:defRPr sz="1800"/>
+            </a:lvl3pPr>
+            <a:lvl4pPr marL="1028700" indent="0">
+              <a:buNone/>
+              <a:defRPr sz="1500"/>
+            </a:lvl4pPr>
+            <a:lvl5pPr marL="1371600" indent="0">
+              <a:buNone/>
+              <a:defRPr sz="1500"/>
+            </a:lvl5pPr>
+            <a:lvl6pPr marL="1714500" indent="0">
+              <a:buNone/>
+              <a:defRPr sz="1500"/>
+            </a:lvl6pPr>
+            <a:lvl7pPr marL="2057400" indent="0">
+              <a:buNone/>
+              <a:defRPr sz="1500"/>
+            </a:lvl7pPr>
+            <a:lvl8pPr marL="2400300" indent="0">
+              <a:buNone/>
+              <a:defRPr sz="1500"/>
+            </a:lvl8pPr>
+            <a:lvl9pPr marL="2743200" indent="0">
+              <a:buNone/>
+              <a:defRPr sz="1500"/>
+            </a:lvl9pPr>
+          </a:lstStyle>
+          <a:p>
+            <a:endParaRPr lang="en-US"/>
+          </a:p>
+        </p:txBody>
+      </p:sp>
+      <p:sp>
+        <p:nvSpPr>
+          <p:cNvPr id="4" name="Text Placeholder 3"/>
+          <p:cNvSpPr>
+            <a:spLocks noGrp="1"/>
+          </p:cNvSpPr>
+          <p:nvPr>
+            <p:ph type="body" sz="half" idx="2"/>
+          </p:nvPr>
+        </p:nvSpPr>
+        <p:spPr>
+          <a:xfrm>
+            <a:off x="1792288" y="4025503"/>
+            <a:ext cx="5486400" cy="603647"/>
+          </a:xfrm>
+        </p:spPr>
+        <p:txBody>
+          <a:bodyPr/>
+          <a:lstStyle>
+            <a:lvl1pPr marL="0" indent="0">
+              <a:buNone/>
+              <a:defRPr sz="1050"/>
+            </a:lvl1pPr>
+            <a:lvl2pPr marL="342900" indent="0">
+              <a:buNone/>
+              <a:defRPr sz="900"/>
+            </a:lvl2pPr>
+            <a:lvl3pPr marL="685800" indent="0">
+              <a:buNone/>
+              <a:defRPr sz="750"/>
+            </a:lvl3pPr>
+            <a:lvl4pPr marL="1028700" indent="0">
+              <a:buNone/>
+              <a:defRPr sz="675"/>
+            </a:lvl4pPr>
+            <a:lvl5pPr marL="1371600" indent="0">
+              <a:buNone/>
+              <a:defRPr sz="675"/>
+            </a:lvl5pPr>
+            <a:lvl6pPr marL="1714500" indent="0">
+              <a:buNone/>
+              <a:defRPr sz="675"/>
+            </a:lvl6pPr>
+            <a:lvl7pPr marL="2057400" indent="0">
+              <a:buNone/>
+              <a:defRPr sz="675"/>
+            </a:lvl7pPr>
+            <a:lvl8pPr marL="2400300" indent="0">
+              <a:buNone/>
+              <a:defRPr sz="675"/>
+            </a:lvl8pPr>
+            <a:lvl9pPr marL="2743200" indent="0">
+              <a:buNone/>
+              <a:defRPr sz="675"/>
+            </a:lvl9pPr>
+          </a:lstStyle>
+          <a:p>
+            <a:pPr lvl="0"/>
+            <a:r>
+              <a:rPr lang="en-US"/>
+              <a:t>Click to edit Master text styles</a:t>
+            </a:r>
+          </a:p>
+        </p:txBody>
+      </p:sp>
+      <p:sp>
+        <p:nvSpPr>
+          <p:cNvPr id="5" name="Date Placeholder 4"/>
+          <p:cNvSpPr>
+            <a:spLocks noGrp="1"/>
+          </p:cNvSpPr>
+          <p:nvPr>
+            <p:ph type="dt" sz="half" idx="10"/>
+          </p:nvPr>
+        </p:nvSpPr>
+        <p:spPr/>
+        <p:txBody>
+          <a:bodyPr/>
+          <a:lstStyle/>
+          <a:p>
+            <a:fld id="{241EB5C9-1307-BA42-ABA2-0BC069CD8E7F}" type="datetimeFigureOut">
+              <a:rPr lang="en-US" smtClean="0"/>
+              <a:t>1/2/22</a:t>
+            </a:fld>
+            <a:endParaRPr lang="en-US"/>
+          </a:p>
+        </p:txBody>
+      </p:sp>
+      <p:sp>
+        <p:nvSpPr>
+          <p:cNvPr id="6" name="Footer Placeholder 5"/>
+          <p:cNvSpPr>
+            <a:spLocks noGrp="1"/>
+          </p:cNvSpPr>
+          <p:nvPr>
+            <p:ph type="ftr" sz="quarter" idx="11"/>
+          </p:nvPr>
+        </p:nvSpPr>
+        <p:spPr/>
+        <p:txBody>
+          <a:bodyPr/>
+          <a:lstStyle/>
+          <a:p>
+            <a:endParaRPr lang="en-US"/>
+          </a:p>
+        </p:txBody>
+      </p:sp>
+      <p:sp>
+        <p:nvSpPr>
+          <p:cNvPr id="7" name="Slide Number Placeholder 6"/>
+          <p:cNvSpPr>
+            <a:spLocks noGrp="1"/>
+          </p:cNvSpPr>
+          <p:nvPr>
+            <p:ph type="sldNum" sz="quarter" idx="12"/>
+          </p:nvPr>
+        </p:nvSpPr>
+        <p:spPr/>
+        <p:txBody>
+          <a:bodyPr/>
+          <a:lstStyle/>
+          <a:p>
+            <a:fld id="{C5EF2332-01BF-834F-8236-50238282D533}" type="slidenum">
+              <a:rPr lang="en-US" smtClean="0"/>
+              <a:t>‹#›</a:t>
+            </a:fld>
+            <a:endParaRPr lang="en-US"/>
+          </a:p>
+        </p:txBody>
+      </p:sp>
+    </p:spTree>
+    <p:extLst>
+      <p:ext uri="{BB962C8B-B14F-4D97-AF65-F5344CB8AC3E}">
+        <p14:creationId xmlns:p14="http://schemas.microsoft.com/office/powerpoint/2010/main" val="3566899855"/>
+      </p:ext>
+    </p:extLst>
   </p:cSld>
   <p:clrMapOvr>
     <a:masterClrMapping/>
@@ -233,27 +3164,18 @@
         </p:nvSpPr>
         <p:spPr>
           <a:xfrm>
-            <a:off x="838200" y="365125"/>
-            <a:ext cx="10515600" cy="1325563"/>
+            <a:off x="457200" y="205979"/>
+            <a:ext cx="8229600" cy="857250"/>
           </a:xfrm>
           <a:prstGeom prst="rect">
             <a:avLst/>
           </a:prstGeom>
         </p:spPr>
         <p:txBody>
-          <a:bodyPr vert="horz" lIns="91440" tIns="45720" rIns="91440" bIns="45720" rtlCol="0" anchor="ctr"/>
-          <a:lstStyle>
-            <a:lvl1pPr algn="l">
-              <a:defRPr sz="4400" b="0">
-                <a:solidFill>
-                  <a:schemeClr val="dk1"/>
-                </a:solidFill>
-                <a:latin typeface="+mj-lt"/>
-                <a:ea typeface="+mj-ea"/>
-                <a:cs typeface="+mj-cs"/>
-              </a:defRPr>
-            </a:lvl1pPr>
-          </a:lstStyle>
+          <a:bodyPr vert="horz" lIns="91440" tIns="45720" rIns="91440" bIns="45720" rtlCol="0" anchor="ctr">
+            <a:normAutofit/>
+          </a:bodyPr>
+          <a:lstStyle/>
           <a:p>
             <a:r>
               <a:rPr lang="en-US"/>
@@ -274,62 +3196,18 @@
         </p:nvSpPr>
         <p:spPr>
           <a:xfrm>
-            <a:off x="838200" y="1825625"/>
-            <a:ext cx="10515600" cy="4351338"/>
+            <a:off x="457200" y="1200151"/>
+            <a:ext cx="8229600" cy="3394472"/>
           </a:xfrm>
           <a:prstGeom prst="rect">
             <a:avLst/>
           </a:prstGeom>
         </p:spPr>
         <p:txBody>
-          <a:bodyPr vert="horz" lIns="91440" tIns="45720" rIns="91440" bIns="45720" rtlCol="0"/>
-          <a:lstStyle>
-            <a:lvl1pPr marL="0" indent="0" algn="l">
-              <a:buNone/>
-              <a:defRPr sz="2800">
-                <a:solidFill>
-                  <a:schemeClr val="dk1"/>
-                </a:solidFill>
-                <a:latin typeface="+mn-lt"/>
-              </a:defRPr>
-            </a:lvl1pPr>
-            <a:lvl2pPr marL="457200" indent="0" algn="l">
-              <a:buNone/>
-              <a:defRPr sz="2400">
-                <a:solidFill>
-                  <a:schemeClr val="dk1"/>
-                </a:solidFill>
-                <a:latin typeface="+mn-lt"/>
-              </a:defRPr>
-            </a:lvl2pPr>
-            <a:lvl3pPr marL="914400" indent="0" algn="l">
-              <a:buNone/>
-              <a:defRPr sz="2000">
-                <a:solidFill>
-                  <a:schemeClr val="dk1"/>
-                </a:solidFill>
-                <a:latin typeface="+mn-lt"/>
-              </a:defRPr>
-            </a:lvl3pPr>
-            <a:lvl4pPr marL="1371600" indent="0" algn="l">
-              <a:buNone/>
-              <a:defRPr sz="1800">
-                <a:solidFill>
-                  <a:schemeClr val="dk1"/>
-                </a:solidFill>
-                <a:latin typeface="+mn-lt"/>
-              </a:defRPr>
-            </a:lvl4pPr>
-            <a:lvl5pPr marL="1828800" indent="0" algn="l">
-              <a:buNone/>
-              <a:defRPr sz="1800">
-                <a:solidFill>
-                  <a:schemeClr val="dk1"/>
-                </a:solidFill>
-                <a:latin typeface="+mn-lt"/>
-              </a:defRPr>
-            </a:lvl5pPr>
-          </a:lstStyle>
+          <a:bodyPr vert="horz" lIns="91440" tIns="45720" rIns="91440" bIns="45720" rtlCol="0">
+            <a:normAutofit/>
+          </a:bodyPr>
+          <a:lstStyle/>
           <a:p>
             <a:pPr lvl="0"/>
             <a:r>
@@ -351,22 +3229,36 @@
               <a:t>Third level</a:t>
             </a:r>
           </a:p>
-        </p:txBody>
-      </p:sp>
-      <p:sp>
-        <p:nvSpPr>
-          <p:cNvPr id="4" name="Slide Number Placeholder 3"/>
-          <p:cNvSpPr>
-            <a:spLocks noGrp="1"/>
-          </p:cNvSpPr>
-          <p:nvPr>
-            <p:ph type="sldNum" sz="quarter" idx="4"/>
+          <a:p>
+            <a:pPr lvl="3"/>
+            <a:r>
+              <a:rPr lang="en-US"/>
+              <a:t>Fourth level</a:t>
+            </a:r>
+          </a:p>
+          <a:p>
+            <a:pPr lvl="4"/>
+            <a:r>
+              <a:rPr lang="en-US"/>
+              <a:t>Fifth level</a:t>
+            </a:r>
+          </a:p>
+        </p:txBody>
+      </p:sp>
+      <p:sp>
+        <p:nvSpPr>
+          <p:cNvPr id="4" name="Date Placeholder 3"/>
+          <p:cNvSpPr>
+            <a:spLocks noGrp="1"/>
+          </p:cNvSpPr>
+          <p:nvPr>
+            <p:ph type="dt" sz="half" idx="2"/>
           </p:nvPr>
         </p:nvSpPr>
         <p:spPr>
           <a:xfrm>
-            <a:off x="8610600" y="6356350"/>
-            <a:ext cx="2743200" cy="365125"/>
+            <a:off x="457200" y="4767263"/>
+            <a:ext cx="2133600" cy="273844"/>
           </a:xfrm>
           <a:prstGeom prst="rect">
             <a:avLst/>
@@ -375,16 +3267,96 @@
         <p:txBody>
           <a:bodyPr vert="horz" lIns="91440" tIns="45720" rIns="91440" bIns="45720" rtlCol="0" anchor="ctr"/>
           <a:lstStyle>
-            <a:lvl1pPr algn="r">
-              <a:defRPr sz="1200">
+            <a:lvl1pPr algn="l">
+              <a:defRPr sz="900">
                 <a:solidFill>
-                  <a:schemeClr val="dk1"/>
+                  <a:schemeClr val="tx1">
+                    <a:tint val="75000"/>
+                  </a:schemeClr>
                 </a:solidFill>
               </a:defRPr>
             </a:lvl1pPr>
           </a:lstStyle>
           <a:p>
-            <a:fld id="{B6F15528-21DE-4FAA-801F-C0D5B2D67AA7}" type="slidenum">
+            <a:fld id="{241EB5C9-1307-BA42-ABA2-0BC069CD8E7F}" type="datetimeFigureOut">
+              <a:rPr lang="en-US" smtClean="0"/>
+              <a:t>1/2/22</a:t>
+            </a:fld>
+            <a:endParaRPr lang="en-US"/>
+          </a:p>
+        </p:txBody>
+      </p:sp>
+      <p:sp>
+        <p:nvSpPr>
+          <p:cNvPr id="5" name="Footer Placeholder 4"/>
+          <p:cNvSpPr>
+            <a:spLocks noGrp="1"/>
+          </p:cNvSpPr>
+          <p:nvPr>
+            <p:ph type="ftr" sz="quarter" idx="3"/>
+          </p:nvPr>
+        </p:nvSpPr>
+        <p:spPr>
+          <a:xfrm>
+            <a:off x="3124200" y="4767263"/>
+            <a:ext cx="2895600" cy="273844"/>
+          </a:xfrm>
+          <a:prstGeom prst="rect">
+            <a:avLst/>
+          </a:prstGeom>
+        </p:spPr>
+        <p:txBody>
+          <a:bodyPr vert="horz" lIns="91440" tIns="45720" rIns="91440" bIns="45720" rtlCol="0" anchor="ctr"/>
+          <a:lstStyle>
+            <a:lvl1pPr algn="ctr">
+              <a:defRPr sz="900">
+                <a:solidFill>
+                  <a:schemeClr val="tx1">
+                    <a:tint val="75000"/>
+                  </a:schemeClr>
+                </a:solidFill>
+              </a:defRPr>
+            </a:lvl1pPr>
+          </a:lstStyle>
+          <a:p>
+            <a:endParaRPr lang="en-US"/>
+          </a:p>
+        </p:txBody>
+      </p:sp>
+      <p:sp>
+        <p:nvSpPr>
+          <p:cNvPr id="6" name="Slide Number Placeholder 5"/>
+          <p:cNvSpPr>
+            <a:spLocks noGrp="1"/>
+          </p:cNvSpPr>
+          <p:nvPr>
+            <p:ph type="sldNum" sz="quarter" idx="4"/>
+          </p:nvPr>
+        </p:nvSpPr>
+        <p:spPr>
+          <a:xfrm>
+            <a:off x="6553200" y="4767263"/>
+            <a:ext cx="2133600" cy="273844"/>
+          </a:xfrm>
+          <a:prstGeom prst="rect">
+            <a:avLst/>
+          </a:prstGeom>
+        </p:spPr>
+        <p:txBody>
+          <a:bodyPr vert="horz" lIns="91440" tIns="45720" rIns="91440" bIns="45720" rtlCol="0" anchor="ctr"/>
+          <a:lstStyle>
+            <a:lvl1pPr algn="r">
+              <a:defRPr sz="900">
+                <a:solidFill>
+                  <a:schemeClr val="tx1">
+                    <a:tint val="75000"/>
+                  </a:schemeClr>
+                </a:solidFill>
+              </a:defRPr>
+            </a:lvl1pPr>
+          </a:lstStyle>
+          <a:p>
+            <a:fld id="{C5EF2332-01BF-834F-8236-50238282D533}" type="slidenum">
               <a:rPr lang="en-US" smtClean="0"/>
               <a:t>‹#›</a:t>
             </a:fld>
@@ -393,18 +3365,36 @@
         </p:txBody>
       </p:sp>
     </p:spTree>
+    <p:extLst>
+      <p:ext uri="{BB962C8B-B14F-4D97-AF65-F5344CB8AC3E}">
+        <p14:creationId xmlns:p14="http://schemas.microsoft.com/office/powerpoint/2010/main" val="3676200875"/>
+      </p:ext>
+    </p:extLst>
   </p:cSld>
   <p:clrMap bg1="lt1" tx1="dk1" bg2="lt2" tx2="dk2" accent1="accent1" accent2="accent2" accent3="accent3" accent4="accent4" accent5="accent5" accent6="accent6" hlink="hlink" folHlink="folHlink"/>
   <p:sldLayoutIdLst>
     <p:sldLayoutId id="2147483649" r:id="rId1"/>
     <p:sldLayoutId id="2147483650" r:id="rId2"/>
+    <p:sldLayoutId id="2147483651" r:id="rId3"/>
+    <p:sldLayoutId id="2147483652" r:id="rId4"/>
+    <p:sldLayoutId id="2147483653" r:id="rId5"/>
+    <p:sldLayoutId id="2147483654" r:id="rId6"/>
+    <p:sldLayoutId id="2147483655" r:id="rId7"/>
+    <p:sldLayoutId id="2147483656" r:id="rId8"/>
+    <p:sldLayoutId id="2147483657" r:id="rId9"/>
+    <p:sldLayoutId id="2147483658" r:id="rId10"/>
+    <p:sldLayoutId id="2147483659" r:id="rId11"/>
   </p:sldLayoutIdLst>
   <p:txStyles>
     <p:titleStyle>
-      <a:lvl1pPr algn="l">
-        <a:defRPr sz="4400" b="0" kern="1200">
+      <a:lvl1pPr algn="ctr" defTabSz="342900" rtl="0" eaLnBrk="1" latinLnBrk="0" hangingPunct="1">
+        <a:spcBef>
+          <a:spcPct val="0"/>
+        </a:spcBef>
+        <a:buNone/>
+        <a:defRPr sz="3300" kern="1200">
           <a:solidFill>
-            <a:schemeClr val="dk1"/>
+            <a:schemeClr val="tx1"/>
           </a:solidFill>
           <a:latin typeface="+mj-lt"/>
           <a:ea typeface="+mj-ea"/>
@@ -413,61 +3403,565 @@
       </a:lvl1pPr>
     </p:titleStyle>
     <p:bodyStyle>
-      <a:lvl1pPr marL="0" indent="0" algn="l">
-        <a:buNone/>
-        <a:defRPr sz="2800" kern="1200">
+      <a:lvl1pPr marL="342900" indent="-342900" algn="l" defTabSz="342900" rtl="0" eaLnBrk="1" latinLnBrk="0" hangingPunct="1">
+        <a:spcBef>
+          <a:spcPct val="20000"/>
+        </a:spcBef>
+        <a:buFont typeface="Arial"/>
+        <a:buChar char="•"/>
+        <a:defRPr sz="2400" kern="1200">
           <a:solidFill>
-            <a:schemeClr val="dk1"/>
+            <a:schemeClr val="tx1"/>
           </a:solidFill>
           <a:latin typeface="+mn-lt"/>
           <a:ea typeface="+mn-ea"/>
           <a:cs typeface="+mn-cs"/>
         </a:defRPr>
       </a:lvl1pPr>
-      <a:lvl2pPr marL="457200" indent="0" algn="l">
-        <a:buNone/>
-        <a:defRPr sz="2400" kern="1200">
+      <a:lvl2pPr marL="685800" indent="-342900" algn="l" defTabSz="342900" rtl="0" eaLnBrk="1" latinLnBrk="0" hangingPunct="1">
+        <a:spcBef>
+          <a:spcPct val="20000"/>
+        </a:spcBef>
+        <a:buFont typeface="Arial"/>
+        <a:buChar char="–"/>
+        <a:defRPr sz="2100" kern="1200">
           <a:solidFill>
-            <a:schemeClr val="dk1"/>
+            <a:schemeClr val="tx1"/>
           </a:solidFill>
           <a:latin typeface="+mn-lt"/>
+          <a:ea typeface="+mn-ea"/>
+          <a:cs typeface="+mn-cs"/>
         </a:defRPr>
       </a:lvl2pPr>
-      <a:lvl3pPr marL="914400" indent="0" algn="l">
-        <a:buNone/>
-        <a:defRPr sz="2000" kern="1200">
+      <a:lvl3pPr marL="1028700" indent="-342900" algn="l" defTabSz="342900" rtl="0" eaLnBrk="1" latinLnBrk="0" hangingPunct="1">
+        <a:spcBef>
+          <a:spcPct val="20000"/>
+        </a:spcBef>
+        <a:buFont typeface="Arial"/>
+        <a:buChar char="•"/>
+        <a:defRPr sz="1800" kern="1200">
           <a:solidFill>
-            <a:schemeClr val="dk1"/>
+            <a:schemeClr val="tx1"/>
           </a:solidFill>
           <a:latin typeface="+mn-lt"/>
+          <a:ea typeface="+mn-ea"/>
+          <a:cs typeface="+mn-cs"/>
         </a:defRPr>
       </a:lvl3pPr>
-      <a:lvl4pPr marL="1371600" indent="0" algn="l">
-        <a:buNone/>
-        <a:defRPr sz="1800" kern="1200">
+      <a:lvl4pPr marL="1371600" indent="-342900" algn="l" defTabSz="342900" rtl="0" eaLnBrk="1" latinLnBrk="0" hangingPunct="1">
+        <a:spcBef>
+          <a:spcPct val="20000"/>
+        </a:spcBef>
+        <a:buFont typeface="Arial"/>
+        <a:buChar char="–"/>
+        <a:defRPr sz="1500" kern="1200">
           <a:solidFill>
-            <a:schemeClr val="dk1"/>
+            <a:schemeClr val="tx1"/>
           </a:solidFill>
           <a:latin typeface="+mn-lt"/>
+          <a:ea typeface="+mn-ea"/>
+          <a:cs typeface="+mn-cs"/>
         </a:defRPr>
       </a:lvl4pPr>
-      <a:lvl5pPr marL="1828800" indent="0" algn="l">
-        <a:buNone/>
-        <a:defRPr sz="1800" kern="1200">
+      <a:lvl5pPr marL="1714500" indent="-342900" algn="l" defTabSz="342900" rtl="0" eaLnBrk="1" latinLnBrk="0" hangingPunct="1">
+        <a:spcBef>
+          <a:spcPct val="20000"/>
+        </a:spcBef>
+        <a:buFont typeface="Arial"/>
+        <a:buChar char="»"/>
+        <a:defRPr sz="1500" kern="1200">
           <a:solidFill>
-            <a:schemeClr val="dk1"/>
+            <a:schemeClr val="tx1"/>
           </a:solidFill>
           <a:latin typeface="+mn-lt"/>
+          <a:ea typeface="+mn-ea"/>
+          <a:cs typeface="+mn-cs"/>
         </a:defRPr>
       </a:lvl5pPr>
+      <a:lvl6pPr marL="2057400" indent="-342900" algn="l" defTabSz="342900" rtl="0" eaLnBrk="1" latinLnBrk="0" hangingPunct="1">
+        <a:spcBef>
+          <a:spcPct val="20000"/>
+        </a:spcBef>
+        <a:buFont typeface="Arial"/>
+        <a:buChar char="•"/>
+        <a:defRPr sz="1500" kern="1200">
+          <a:solidFill>
+            <a:schemeClr val="tx1"/>
+          </a:solidFill>
+          <a:latin typeface="+mn-lt"/>
+          <a:ea typeface="+mn-ea"/>
+          <a:cs typeface="+mn-cs"/>
+        </a:defRPr>
+      </a:lvl6pPr>
+      <a:lvl7pPr marL="2400300" indent="-342900" algn="l" defTabSz="342900" rtl="0" eaLnBrk="1" latinLnBrk="0" hangingPunct="1">
+        <a:spcBef>
+          <a:spcPct val="20000"/>
+        </a:spcBef>
+        <a:buFont typeface="Arial"/>
+        <a:buChar char="•"/>
+        <a:defRPr sz="1500" kern="1200">
+          <a:solidFill>
+            <a:schemeClr val="tx1"/>
+          </a:solidFill>
+          <a:latin typeface="+mn-lt"/>
+          <a:ea typeface="+mn-ea"/>
+          <a:cs typeface="+mn-cs"/>
+        </a:defRPr>
+      </a:lvl7pPr>
+      <a:lvl8pPr marL="2743200" indent="-342900" algn="l" defTabSz="342900" rtl="0" eaLnBrk="1" latinLnBrk="0" hangingPunct="1">
+        <a:spcBef>
+          <a:spcPct val="20000"/>
+        </a:spcBef>
+        <a:buFont typeface="Arial"/>
+        <a:buChar char="•"/>
+        <a:defRPr sz="1500" kern="1200">
+          <a:solidFill>
+            <a:schemeClr val="tx1"/>
+          </a:solidFill>
+          <a:latin typeface="+mn-lt"/>
+          <a:ea typeface="+mn-ea"/>
+          <a:cs typeface="+mn-cs"/>
+        </a:defRPr>
+      </a:lvl8pPr>
+      <a:lvl9pPr marL="3086100" indent="-342900" algn="l" defTabSz="342900" rtl="0" eaLnBrk="1" latinLnBrk="0" hangingPunct="1">
+        <a:spcBef>
+          <a:spcPct val="20000"/>
+        </a:spcBef>
+        <a:buFont typeface="Arial"/>
+        <a:buChar char="•"/>
+        <a:defRPr sz="1500" kern="1200">
+          <a:solidFill>
+            <a:schemeClr val="tx1"/>
+          </a:solidFill>
+          <a:latin typeface="+mn-lt"/>
+          <a:ea typeface="+mn-ea"/>
+          <a:cs typeface="+mn-cs"/>
+        </a:defRPr>
+      </a:lvl9pPr>
     </p:bodyStyle>
     <p:otherStyle>
       <a:defPPr>
         <a:defRPr lang="en-US"/>
       </a:defPPr>
+      <a:lvl1pPr marL="0" algn="l" defTabSz="342900" rtl="0" eaLnBrk="1" latinLnBrk="0" hangingPunct="1">
+        <a:defRPr sz="1350" kern="1200">
+          <a:solidFill>
+            <a:schemeClr val="tx1"/>
+          </a:solidFill>
+          <a:latin typeface="+mn-lt"/>
+          <a:ea typeface="+mn-ea"/>
+          <a:cs typeface="+mn-cs"/>
+        </a:defRPr>
+      </a:lvl1pPr>
+      <a:lvl2pPr marL="342900" algn="l" defTabSz="342900" rtl="0" eaLnBrk="1" latinLnBrk="0" hangingPunct="1">
+        <a:defRPr sz="1350" kern="1200">
+          <a:solidFill>
+            <a:schemeClr val="tx1"/>
+          </a:solidFill>
+          <a:latin typeface="+mn-lt"/>
+          <a:ea typeface="+mn-ea"/>
+          <a:cs typeface="+mn-cs"/>
+        </a:defRPr>
+      </a:lvl2pPr>
+      <a:lvl3pPr marL="685800" algn="l" defTabSz="342900" rtl="0" eaLnBrk="1" latinLnBrk="0" hangingPunct="1">
+        <a:defRPr sz="1350" kern="1200">
+          <a:solidFill>
+            <a:schemeClr val="tx1"/>
+          </a:solidFill>
+          <a:latin typeface="+mn-lt"/>
+          <a:ea typeface="+mn-ea"/>
+          <a:cs typeface="+mn-cs"/>
+        </a:defRPr>
+      </a:lvl3pPr>
+      <a:lvl4pPr marL="1028700" algn="l" defTabSz="342900" rtl="0" eaLnBrk="1" latinLnBrk="0" hangingPunct="1">
+        <a:defRPr sz="1350" kern="1200">
+          <a:solidFill>
+            <a:schemeClr val="tx1"/>
+          </a:solidFill>
+          <a:latin typeface="+mn-lt"/>
+          <a:ea typeface="+mn-ea"/>
+          <a:cs typeface="+mn-cs"/>
+        </a:defRPr>
+      </a:lvl4pPr>
+      <a:lvl5pPr marL="1371600" algn="l" defTabSz="342900" rtl="0" eaLnBrk="1" latinLnBrk="0" hangingPunct="1">
+        <a:defRPr sz="1350" kern="1200">
+          <a:solidFill>
+            <a:schemeClr val="tx1"/>
+          </a:solidFill>
+          <a:latin typeface="+mn-lt"/>
+          <a:ea typeface="+mn-ea"/>
+          <a:cs typeface="+mn-cs"/>
+        </a:defRPr>
+      </a:lvl5pPr>
+      <a:lvl6pPr marL="1714500" algn="l" defTabSz="342900" rtl="0" eaLnBrk="1" latinLnBrk="0" hangingPunct="1">
+        <a:defRPr sz="1350" kern="1200">
+          <a:solidFill>
+            <a:schemeClr val="tx1"/>
+          </a:solidFill>
+          <a:latin typeface="+mn-lt"/>
+          <a:ea typeface="+mn-ea"/>
+          <a:cs typeface="+mn-cs"/>
+        </a:defRPr>
+      </a:lvl6pPr>
+      <a:lvl7pPr marL="2057400" algn="l" defTabSz="342900" rtl="0" eaLnBrk="1" latinLnBrk="0" hangingPunct="1">
+        <a:defRPr sz="1350" kern="1200">
+          <a:solidFill>
+            <a:schemeClr val="tx1"/>
+          </a:solidFill>
+          <a:latin typeface="+mn-lt"/>
+          <a:ea typeface="+mn-ea"/>
+          <a:cs typeface="+mn-cs"/>
+        </a:defRPr>
+      </a:lvl7pPr>
+      <a:lvl8pPr marL="2400300" algn="l" defTabSz="342900" rtl="0" eaLnBrk="1" latinLnBrk="0" hangingPunct="1">
+        <a:defRPr sz="1350" kern="1200">
+          <a:solidFill>
+            <a:schemeClr val="tx1"/>
+          </a:solidFill>
+          <a:latin typeface="+mn-lt"/>
+          <a:ea typeface="+mn-ea"/>
+          <a:cs typeface="+mn-cs"/>
+        </a:defRPr>
+      </a:lvl8pPr>
+      <a:lvl9pPr marL="2743200" algn="l" defTabSz="342900" rtl="0" eaLnBrk="1" latinLnBrk="0" hangingPunct="1">
+        <a:defRPr sz="1350" kern="1200">
+          <a:solidFill>
+            <a:schemeClr val="tx1"/>
+          </a:solidFill>
+          <a:latin typeface="+mn-lt"/>
+          <a:ea typeface="+mn-ea"/>
+          <a:cs typeface="+mn-cs"/>
+        </a:defRPr>
+      </a:lvl9pPr>
     </p:otherStyle>
   </p:txStyles>
 </p:sldMaster>
+</file>
+
+<file path=ppt/slides/slide1.xml><?xml version="1.0" encoding="utf-8"?>
+<p:sld xmlns:a="http://schemas.openxmlformats.org/drawingml/2006/main" xmlns:r="http://schemas.openxmlformats.org/officeDocument/2006/relationships" xmlns:p="http://schemas.openxmlformats.org/presentationml/2006/main">
+  <p:cSld>
+    <p:spTree>
+      <p:nvGrpSpPr>
+        <p:cNvPr id="1" name=""/>
+        <p:cNvGrpSpPr/>
+        <p:nvPr/>
+      </p:nvGrpSpPr>
+      <p:grpSpPr>
+        <a:xfrm>
+          <a:off x="0" y="0"/>
+          <a:ext cx="0" cy="0"/>
+          <a:chOff x="0" y="0"/>
+          <a:chExt cx="0" cy="0"/>
+        </a:xfrm>
+      </p:grpSpPr>
+      <p:sp>
+        <p:nvSpPr>
+          <p:cNvPr id="2" name="Title 1"/>
+          <p:cNvSpPr>
+            <a:spLocks noGrp="1"/>
+          </p:cNvSpPr>
+          <p:nvPr>
+            <p:ph type="ctrTitle"/>
+          </p:nvPr>
+        </p:nvSpPr>
+        <p:spPr/>
+        <p:txBody>
+          <a:bodyPr/>
+          <a:lstStyle/>
+          <a:p>
+            <a:r>
+              <a:rPr lang="en-US" dirty="0"/>
+              <a:t>Presentation Title</a:t>
+            </a:r>
+          </a:p>
+        </p:txBody>
+      </p:sp>
+      <p:sp>
+        <p:nvSpPr>
+          <p:cNvPr id="3" name="Subtitle 2"/>
+          <p:cNvSpPr>
+            <a:spLocks noGrp="1"/>
+          </p:cNvSpPr>
+          <p:nvPr>
+            <p:ph type="subTitle" idx="1"/>
+          </p:nvPr>
+        </p:nvSpPr>
+        <p:spPr/>
+        <p:txBody>
+          <a:bodyPr/>
+          <a:lstStyle/>
+          <a:p>
+            <a:r>
+              <a:rPr lang="en-US" dirty="0"/>
+              <a:t>Presentation Subtitle</a:t>
+            </a:r>
+          </a:p>
+        </p:txBody>
+      </p:sp>
+    </p:spTree>
+    <p:extLst>
+      <p:ext uri="{BB962C8B-B14F-4D97-AF65-F5344CB8AC3E}">
+        <p14:creationId xmlns:p14="http://schemas.microsoft.com/office/powerpoint/2010/main" val="392669009"/>
+      </p:ext>
+    </p:extLst>
+  </p:cSld>
+  <p:clrMapOvr>
+    <a:masterClrMapping/>
+  </p:clrMapOvr>
+</p:sld>
+</file>
+
+<file path=ppt/slides/slide2.xml><?xml version="1.0" encoding="utf-8"?>
+<p:sld xmlns:a="http://schemas.openxmlformats.org/drawingml/2006/main" xmlns:r="http://schemas.openxmlformats.org/officeDocument/2006/relationships" xmlns:p="http://schemas.openxmlformats.org/presentationml/2006/main">
+  <p:cSld>
+    <p:spTree>
+      <p:nvGrpSpPr>
+        <p:cNvPr id="1" name=""/>
+        <p:cNvGrpSpPr/>
+        <p:nvPr/>
+      </p:nvGrpSpPr>
+      <p:grpSpPr>
+        <a:xfrm>
+          <a:off x="0" y="0"/>
+          <a:ext cx="0" cy="0"/>
+          <a:chOff x="0" y="0"/>
+          <a:chExt cx="0" cy="0"/>
+        </a:xfrm>
+      </p:grpSpPr>
+      <p:sp>
+        <p:nvSpPr>
+          <p:cNvPr id="2" name="Title 1"/>
+          <p:cNvSpPr>
+            <a:spLocks noGrp="1"/>
+          </p:cNvSpPr>
+          <p:nvPr>
+            <p:ph type="title"/>
+          </p:nvPr>
+        </p:nvSpPr>
+        <p:spPr/>
+        <p:txBody>
+          <a:bodyPr/>
+          <a:lstStyle/>
+          <a:p>
+            <a:r>
+              <a:rPr lang="en-US" dirty="0"/>
+              <a:t>Slide Title</a:t>
+            </a:r>
+          </a:p>
+        </p:txBody>
+      </p:sp>
+      <p:sp>
+        <p:nvSpPr>
+          <p:cNvPr id="3" name="Content Placeholder 2"/>
+          <p:cNvSpPr>
+            <a:spLocks noGrp="1"/>
+          </p:cNvSpPr>
+          <p:nvPr>
+            <p:ph idx="1"/>
+          </p:nvPr>
+        </p:nvSpPr>
+        <p:spPr/>
+        <p:txBody>
+          <a:bodyPr/>
+          <a:lstStyle/>
+          <a:p>
+            <a:pPr marL="0" indent="0">
+              <a:buNone/>
+            </a:pPr>
+            <a:r>
+              <a:rPr lang="en-US" dirty="0"/>
+              <a:t>Hello</a:t>
+            </a:r>
+            <a:r>
+              <a:rPr lang="en-US"/>
+              <a:t>, world.</a:t>
+            </a:r>
+          </a:p>
+        </p:txBody>
+      </p:sp>
+    </p:spTree>
+    <p:extLst>
+      <p:ext uri="{BB962C8B-B14F-4D97-AF65-F5344CB8AC3E}">
+        <p14:creationId xmlns:p14="http://schemas.microsoft.com/office/powerpoint/2010/main" val="572707455"/>
+      </p:ext>
+    </p:extLst>
+  </p:cSld>
+  <p:clrMapOvr>
+    <a:masterClrMapping/>
+  </p:clrMapOvr>
+</p:sld>
+</file>
+
+<file path=ppt/slides/slide3.xml><?xml version="1.0" encoding="utf-8"?>
+<p:sld xmlns:a="http://schemas.openxmlformats.org/drawingml/2006/main" xmlns:r="http://schemas.openxmlformats.org/officeDocument/2006/relationships" xmlns:p="http://schemas.openxmlformats.org/presentationml/2006/main">
+  <p:cSld>
+    <p:spTree>
+      <p:nvGrpSpPr>
+        <p:cNvPr id="1" name=""/>
+        <p:cNvGrpSpPr/>
+        <p:nvPr/>
+      </p:nvGrpSpPr>
+      <p:grpSpPr>
+        <a:xfrm>
+          <a:off x="0" y="0"/>
+          <a:ext cx="0" cy="0"/>
+          <a:chOff x="0" y="0"/>
+          <a:chExt cx="0" cy="0"/>
+        </a:xfrm>
+      </p:grpSpPr>
+      <p:sp>
+        <p:nvSpPr>
+          <p:cNvPr id="2" name="Title 1"/>
+          <p:cNvSpPr>
+            <a:spLocks noGrp="1"/>
+          </p:cNvSpPr>
+          <p:nvPr>
+            <p:ph type="title"/>
+          </p:nvPr>
+        </p:nvSpPr>
+        <p:spPr/>
+        <p:txBody>
+          <a:bodyPr/>
+          <a:lstStyle/>
+          <a:p>
+            <a:r>
+              <a:rPr lang="en-US" dirty="0"/>
+              <a:t>Section header</a:t>
+            </a:r>
+          </a:p>
+        </p:txBody>
+      </p:sp>
+      <p:sp>
+        <p:nvSpPr>
+          <p:cNvPr id="3" name="Text Placeholder 2"/>
+          <p:cNvSpPr>
+            <a:spLocks noGrp="1"/>
+          </p:cNvSpPr>
+          <p:nvPr>
+            <p:ph type="body" idx="1"/>
+          </p:nvPr>
+        </p:nvSpPr>
+        <p:spPr/>
+      </p:sp>
+    </p:spTree>
+    <p:extLst>
+      <p:ext uri="{BB962C8B-B14F-4D97-AF65-F5344CB8AC3E}">
+        <p14:creationId xmlns:p14="http://schemas.microsoft.com/office/powerpoint/2010/main" val="3996781534"/>
+      </p:ext>
+    </p:extLst>
+  </p:cSld>
+  <p:clrMapOvr>
+    <a:masterClrMapping/>
+  </p:clrMapOvr>
+</p:sld>
+</file>
+
+<file path=ppt/slides/slide4.xml><?xml version="1.0" encoding="utf-8"?>
+<p:sld xmlns:a="http://schemas.openxmlformats.org/drawingml/2006/main" xmlns:r="http://schemas.openxmlformats.org/officeDocument/2006/relationships" xmlns:p="http://schemas.openxmlformats.org/presentationml/2006/main">
+  <p:cSld>
+    <p:spTree>
+      <p:nvGrpSpPr>
+        <p:cNvPr id="1" name=""/>
+        <p:cNvGrpSpPr/>
+        <p:nvPr/>
+      </p:nvGrpSpPr>
+      <p:grpSpPr>
+        <a:xfrm>
+          <a:off x="0" y="0"/>
+          <a:ext cx="0" cy="0"/>
+          <a:chOff x="0" y="0"/>
+          <a:chExt cx="0" cy="0"/>
+        </a:xfrm>
+      </p:grpSpPr>
+      <p:sp>
+        <p:nvSpPr>
+          <p:cNvPr id="4" name="Title 3"/>
+          <p:cNvSpPr>
+            <a:spLocks noGrp="1"/>
+          </p:cNvSpPr>
+          <p:nvPr>
+            <p:ph type="title"/>
+          </p:nvPr>
+        </p:nvSpPr>
+        <p:spPr/>
+        <p:txBody>
+          <a:bodyPr/>
+          <a:lstStyle/>
+          <a:p>
+            <a:r>
+              <a:rPr lang="en-US" dirty="0"/>
+              <a:t>Slide Title for Two-Content</a:t>
+            </a:r>
+          </a:p>
+        </p:txBody>
+      </p:sp>
+      <p:sp>
+        <p:nvSpPr>
+          <p:cNvPr id="5" name="Content Placeholder 4"/>
+          <p:cNvSpPr>
+            <a:spLocks noGrp="1"/>
+          </p:cNvSpPr>
+          <p:nvPr>
+            <p:ph sz="half" idx="1"/>
+          </p:nvPr>
+        </p:nvSpPr>
+        <p:spPr/>
+        <p:txBody>
+          <a:bodyPr/>
+          <a:lstStyle/>
+          <a:p>
+            <a:r>
+              <a:rPr lang="en-US" dirty="0"/>
+              <a:t>Some content on </a:t>
+            </a:r>
+            <a:r>
+              <a:rPr lang="en-US"/>
+              <a:t>the left.</a:t>
+            </a:r>
+            <a:endParaRPr lang="en-US" dirty="0"/>
+          </a:p>
+          <a:p>
+            <a:pPr marL="0" indent="0">
+              <a:buNone/>
+            </a:pPr>
+            <a:endParaRPr lang="en-US" dirty="0"/>
+          </a:p>
+        </p:txBody>
+      </p:sp>
+      <p:sp>
+        <p:nvSpPr>
+          <p:cNvPr id="6" name="Content Placeholder 5"/>
+          <p:cNvSpPr>
+            <a:spLocks noGrp="1"/>
+          </p:cNvSpPr>
+          <p:nvPr>
+            <p:ph sz="half" idx="2"/>
+          </p:nvPr>
+        </p:nvSpPr>
+        <p:spPr/>
+        <p:txBody>
+          <a:bodyPr/>
+          <a:lstStyle/>
+          <a:p>
+            <a:r>
+              <a:rPr lang="en-US" dirty="0"/>
+              <a:t>Some content on the right.</a:t>
+            </a:r>
+          </a:p>
+        </p:txBody>
+      </p:sp>
+    </p:spTree>
+    <p:extLst>
+      <p:ext uri="{BB962C8B-B14F-4D97-AF65-F5344CB8AC3E}">
+        <p14:creationId xmlns:p14="http://schemas.microsoft.com/office/powerpoint/2010/main" val="1324621109"/>
+      </p:ext>
+    </p:extLst>
+  </p:cSld>
+  <p:clrMapOvr>
+    <a:masterClrMapping/>
+  </p:clrMapOvr>
+</p:sld>
 </file>
 
 <file path=ppt/theme/theme1.xml><?xml version="1.0" encoding="utf-8"?>
@@ -513,12 +4007,12 @@
     </a:clrScheme>
     <a:fontScheme name="Dark">
       <a:majorFont>
-        <a:latin typeface="Segoe UI Light"/>
+        <a:latin typeface="Inter"/>
         <a:ea typeface=""/>
         <a:cs typeface=""/>
       </a:majorFont>
       <a:minorFont>
-        <a:latin typeface="Segoe UI"/>
+        <a:latin typeface="Inter"/>
         <a:ea typeface=""/>
         <a:cs typeface=""/>
       </a:minorFont>
@@ -670,4 +4164,265 @@
   <a:objectDefaults/>
   <a:extraClrSchemeLst/>
 </a:theme>
+</file>
+
+<file path=ppt/theme/theme2.xml><?xml version="1.0" encoding="utf-8"?>
+<a:theme xmlns:a="http://schemas.openxmlformats.org/drawingml/2006/main" name="Office Theme">
+  <a:themeElements>
+    <a:clrScheme name="Office">
+      <a:dk1>
+        <a:sysClr val="windowText" lastClr="000000"/>
+      </a:dk1>
+      <a:lt1>
+        <a:sysClr val="window" lastClr="FFFFFF"/>
+      </a:lt1>
+      <a:dk2>
+        <a:srgbClr val="44546A"/>
+      </a:dk2>
+      <a:lt2>
+        <a:srgbClr val="E7E6E6"/>
+      </a:lt2>
+      <a:accent1>
+        <a:srgbClr val="5B9BD5"/>
+      </a:accent1>
+      <a:accent2>
+        <a:srgbClr val="ED7D31"/>
+      </a:accent2>
+      <a:accent3>
+        <a:srgbClr val="A5A5A5"/>
+      </a:accent3>
+      <a:accent4>
+        <a:srgbClr val="FFC000"/>
+      </a:accent4>
+      <a:accent5>
+        <a:srgbClr val="4472C4"/>
+      </a:accent5>
+      <a:accent6>
+        <a:srgbClr val="70AD47"/>
+      </a:accent6>
+      <a:hlink>
+        <a:srgbClr val="0563C1"/>
+      </a:hlink>
+      <a:folHlink>
+        <a:srgbClr val="954F72"/>
+      </a:folHlink>
+    </a:clrScheme>
+    <a:fontScheme name="Office">
+      <a:majorFont>
+        <a:latin typeface="Calibri Light" panose="020F0302020204030204"/>
+        <a:ea typeface=""/>
+        <a:cs typeface=""/>
+        <a:font script="Jpan" typeface="ＭＳ Ｐゴシック"/>
+        <a:font script="Hang" typeface="맑은 고딕"/>
+        <a:font script="Hans" typeface="宋体"/>
+        <a:font script="Hant" typeface="新細明體"/>
+        <a:font script="Arab" typeface="Times New Roman"/>
+        <a:font script="Hebr" typeface="Times New Roman"/>
+        <a:font script="Thai" typeface="Angsana New"/>
+        <a:font script="Ethi" typeface="Nyala"/>
+        <a:font script="Beng" typeface="Vrinda"/>
+        <a:font script="Gujr" typeface="Shruti"/>
+        <a:font script="Khmr" typeface="MoolBoran"/>
+        <a:font script="Knda" typeface="Tunga"/>
+        <a:font script="Guru" typeface="Raavi"/>
+        <a:font script="Cans" typeface="Euphemia"/>
+        <a:font script="Cher" typeface="Plantagenet Cherokee"/>
+        <a:font script="Yiii" typeface="Microsoft Yi Baiti"/>
+        <a:font script="Tibt" typeface="Microsoft Himalaya"/>
+        <a:font script="Thaa" typeface="MV Boli"/>
+        <a:font script="Deva" typeface="Mangal"/>
+        <a:font script="Telu" typeface="Gautami"/>
+        <a:font script="Taml" typeface="Latha"/>
+        <a:font script="Syrc" typeface="Estrangelo Edessa"/>
+        <a:font script="Orya" typeface="Kalinga"/>
+        <a:font script="Mlym" typeface="Kartika"/>
+        <a:font script="Laoo" typeface="DokChampa"/>
+        <a:font script="Sinh" typeface="Iskoola Pota"/>
+        <a:font script="Mong" typeface="Mongolian Baiti"/>
+        <a:font script="Viet" typeface="Times New Roman"/>
+        <a:font script="Uigh" typeface="Microsoft Uighur"/>
+        <a:font script="Geor" typeface="Sylfaen"/>
+      </a:majorFont>
+      <a:minorFont>
+        <a:latin typeface="Calibri" panose="020F0502020204030204"/>
+        <a:ea typeface=""/>
+        <a:cs typeface=""/>
+        <a:font script="Jpan" typeface="ＭＳ Ｐゴシック"/>
+        <a:font script="Hang" typeface="맑은 고딕"/>
+        <a:font script="Hans" typeface="宋体"/>
+        <a:font script="Hant" typeface="新細明體"/>
+        <a:font script="Arab" typeface="Arial"/>
+        <a:font script="Hebr" typeface="Arial"/>
+        <a:font script="Thai" typeface="Cordia New"/>
+        <a:font script="Ethi" typeface="Nyala"/>
+        <a:font script="Beng" typeface="Vrinda"/>
+        <a:font script="Gujr" typeface="Shruti"/>
+        <a:font script="Khmr" typeface="DaunPenh"/>
+        <a:font script="Knda" typeface="Tunga"/>
+        <a:font script="Guru" typeface="Raavi"/>
+        <a:font script="Cans" typeface="Euphemia"/>
+        <a:font script="Cher" typeface="Plantagenet Cherokee"/>
+        <a:font script="Yiii" typeface="Microsoft Yi Baiti"/>
+        <a:font script="Tibt" typeface="Microsoft Himalaya"/>
+        <a:font script="Thaa" typeface="MV Boli"/>
+        <a:font script="Deva" typeface="Mangal"/>
+        <a:font script="Telu" typeface="Gautami"/>
+        <a:font script="Taml" typeface="Latha"/>
+        <a:font script="Syrc" typeface="Estrangelo Edessa"/>
+        <a:font script="Orya" typeface="Kalinga"/>
+        <a:font script="Mlym" typeface="Kartika"/>
+        <a:font script="Laoo" typeface="DokChampa"/>
+        <a:font script="Sinh" typeface="Iskoola Pota"/>
+        <a:font script="Mong" typeface="Mongolian Baiti"/>
+        <a:font script="Viet" typeface="Arial"/>
+        <a:font script="Uigh" typeface="Microsoft Uighur"/>
+        <a:font script="Geor" typeface="Sylfaen"/>
+      </a:minorFont>
+    </a:fontScheme>
+    <a:fmtScheme name="Office">
+      <a:fillStyleLst>
+        <a:solidFill>
+          <a:schemeClr val="phClr"/>
+        </a:solidFill>
+        <a:gradFill rotWithShape="1">
+          <a:gsLst>
+            <a:gs pos="0">
+              <a:schemeClr val="phClr">
+                <a:lumMod val="110000"/>
+                <a:satMod val="105000"/>
+                <a:tint val="67000"/>
+              </a:schemeClr>
+            </a:gs>
+            <a:gs pos="50000">
+              <a:schemeClr val="phClr">
+                <a:lumMod val="105000"/>
+                <a:satMod val="103000"/>
+                <a:tint val="73000"/>
+              </a:schemeClr>
+            </a:gs>
+            <a:gs pos="100000">
+              <a:schemeClr val="phClr">
+                <a:lumMod val="105000"/>
+                <a:satMod val="109000"/>
+                <a:tint val="81000"/>
+              </a:schemeClr>
+            </a:gs>
+          </a:gsLst>
+          <a:lin ang="5400000" scaled="0"/>
+        </a:gradFill>
+        <a:gradFill rotWithShape="1">
+          <a:gsLst>
+            <a:gs pos="0">
+              <a:schemeClr val="phClr">
+                <a:satMod val="103000"/>
+                <a:lumMod val="102000"/>
+                <a:tint val="94000"/>
+              </a:schemeClr>
+            </a:gs>
+            <a:gs pos="50000">
+              <a:schemeClr val="phClr">
+                <a:satMod val="110000"/>
+                <a:lumMod val="100000"/>
+                <a:shade val="100000"/>
+              </a:schemeClr>
+            </a:gs>
+            <a:gs pos="100000">
+              <a:schemeClr val="phClr">
+                <a:lumMod val="99000"/>
+                <a:satMod val="120000"/>
+                <a:shade val="78000"/>
+              </a:schemeClr>
+            </a:gs>
+          </a:gsLst>
+          <a:lin ang="5400000" scaled="0"/>
+        </a:gradFill>
+      </a:fillStyleLst>
+      <a:lnStyleLst>
+        <a:ln w="6350" cap="flat" cmpd="sng" algn="ctr">
+          <a:solidFill>
+            <a:schemeClr val="phClr"/>
+          </a:solidFill>
+          <a:prstDash val="solid"/>
+          <a:miter lim="800000"/>
+        </a:ln>
+        <a:ln w="12700" cap="flat" cmpd="sng" algn="ctr">
+          <a:solidFill>
+            <a:schemeClr val="phClr"/>
+          </a:solidFill>
+          <a:prstDash val="solid"/>
+          <a:miter lim="800000"/>
+        </a:ln>
+        <a:ln w="19050" cap="flat" cmpd="sng" algn="ctr">
+          <a:solidFill>
+            <a:schemeClr val="phClr"/>
+          </a:solidFill>
+          <a:prstDash val="solid"/>
+          <a:miter lim="800000"/>
+        </a:ln>
+      </a:lnStyleLst>
+      <a:effectStyleLst>
+        <a:effectStyle>
+          <a:effectLst/>
+        </a:effectStyle>
+        <a:effectStyle>
+          <a:effectLst/>
+        </a:effectStyle>
+        <a:effectStyle>
+          <a:effectLst>
+            <a:outerShdw blurRad="57150" dist="19050" dir="5400000" algn="ctr" rotWithShape="0">
+              <a:srgbClr val="000000">
+                <a:alpha val="63000"/>
+              </a:srgbClr>
+            </a:outerShdw>
+          </a:effectLst>
+        </a:effectStyle>
+      </a:effectStyleLst>
+      <a:bgFillStyleLst>
+        <a:solidFill>
+          <a:schemeClr val="phClr"/>
+        </a:solidFill>
+        <a:solidFill>
+          <a:schemeClr val="phClr">
+            <a:tint val="95000"/>
+            <a:satMod val="170000"/>
+          </a:schemeClr>
+        </a:solidFill>
+        <a:gradFill rotWithShape="1">
+          <a:gsLst>
+            <a:gs pos="0">
+              <a:schemeClr val="phClr">
+                <a:tint val="93000"/>
+                <a:satMod val="150000"/>
+                <a:shade val="98000"/>
+                <a:lumMod val="102000"/>
+              </a:schemeClr>
+            </a:gs>
+            <a:gs pos="50000">
+              <a:schemeClr val="phClr">
+                <a:tint val="98000"/>
+                <a:satMod val="130000"/>
+                <a:shade val="90000"/>
+                <a:lumMod val="103000"/>
+              </a:schemeClr>
+            </a:gs>
+            <a:gs pos="100000">
+              <a:schemeClr val="phClr">
+                <a:shade val="63000"/>
+                <a:satMod val="120000"/>
+              </a:schemeClr>
+            </a:gs>
+          </a:gsLst>
+          <a:lin ang="5400000" scaled="0"/>
+        </a:gradFill>
+      </a:bgFillStyleLst>
+    </a:fmtScheme>
+  </a:themeElements>
+  <a:objectDefaults/>
+  <a:extraClrSchemeLst/>
+  <a:extLst>
+    <a:ext uri="{05A4C25C-085E-4340-85A3-A5531E510DB2}">
+      <thm15:themeFamily xmlns:thm15="http://schemas.microsoft.com/office/thememl/2012/main" name="Office Theme" id="{62F939B6-93AF-4DB8-9C6B-D6C7DFDC589F}" vid="{4A3C46E8-61CC-4603-A589-7422A47A8E4A}"/>
+    </a:ext>
+  </a:extLst>
+</a:theme>
 </file>